--- a/sorghum_results_2026-09-20.pptx
+++ b/sorghum_results_2026-09-20.pptx
@@ -3486,7 +3486,7 @@
         <p:spPr>
           <a:xfrm>
             <a:off x="502920" y="310896"/>
-            <a:ext cx="914400" cy="365760"/>
+            <a:ext cx="640080" cy="365760"/>
           </a:xfrm>
           <a:prstGeom prst="rect">
             <a:avLst/>
@@ -3524,8 +3524,8 @@
         </p:nvSpPr>
         <p:spPr>
           <a:xfrm>
-            <a:off x="1234440" y="237744"/>
-            <a:ext cx="8778240" cy="731520"/>
+            <a:off x="1234440" y="201168"/>
+            <a:ext cx="7543800" cy="786384"/>
           </a:xfrm>
           <a:prstGeom prst="rect">
             <a:avLst/>
@@ -3544,7 +3544,7 @@
               </a:spcAft>
             </a:pPr>
             <a:r>
-              <a:rPr sz="2700" b="1">
+              <a:rPr sz="2400" b="1">
                 <a:solidFill>
                   <a:srgbClr val="10171C"/>
                 </a:solidFill>
@@ -3564,7 +3564,7 @@
         <p:spPr>
           <a:xfrm>
             <a:off x="9052560" y="365760"/>
-            <a:ext cx="2743200" cy="365760"/>
+            <a:ext cx="2697480" cy="365760"/>
           </a:xfrm>
           <a:prstGeom prst="rect">
             <a:avLst/>
@@ -3752,7 +3752,7 @@
         <p:spPr>
           <a:xfrm>
             <a:off x="502920" y="310896"/>
-            <a:ext cx="914400" cy="365760"/>
+            <a:ext cx="640080" cy="365760"/>
           </a:xfrm>
           <a:prstGeom prst="rect">
             <a:avLst/>
@@ -3790,8 +3790,8 @@
         </p:nvSpPr>
         <p:spPr>
           <a:xfrm>
-            <a:off x="1234440" y="237744"/>
-            <a:ext cx="8778240" cy="731520"/>
+            <a:off x="1234440" y="201168"/>
+            <a:ext cx="7543800" cy="786384"/>
           </a:xfrm>
           <a:prstGeom prst="rect">
             <a:avLst/>
@@ -3810,7 +3810,7 @@
               </a:spcAft>
             </a:pPr>
             <a:r>
-              <a:rPr sz="2700" b="1">
+              <a:rPr sz="2400" b="1">
                 <a:solidFill>
                   <a:srgbClr val="10171C"/>
                 </a:solidFill>
@@ -3830,7 +3830,7 @@
         <p:spPr>
           <a:xfrm>
             <a:off x="9052560" y="365760"/>
-            <a:ext cx="2743200" cy="365760"/>
+            <a:ext cx="2697480" cy="365760"/>
           </a:xfrm>
           <a:prstGeom prst="rect">
             <a:avLst/>
@@ -4130,7 +4130,7 @@
         <p:spPr>
           <a:xfrm>
             <a:off x="502920" y="310896"/>
-            <a:ext cx="914400" cy="365760"/>
+            <a:ext cx="640080" cy="365760"/>
           </a:xfrm>
           <a:prstGeom prst="rect">
             <a:avLst/>
@@ -4168,8 +4168,8 @@
         </p:nvSpPr>
         <p:spPr>
           <a:xfrm>
-            <a:off x="1234440" y="237744"/>
-            <a:ext cx="8778240" cy="731520"/>
+            <a:off x="1234440" y="201168"/>
+            <a:ext cx="7543800" cy="786384"/>
           </a:xfrm>
           <a:prstGeom prst="rect">
             <a:avLst/>
@@ -4188,7 +4188,7 @@
               </a:spcAft>
             </a:pPr>
             <a:r>
-              <a:rPr sz="2700" b="1">
+              <a:rPr sz="2400" b="1">
                 <a:solidFill>
                   <a:srgbClr val="10171C"/>
                 </a:solidFill>
@@ -4208,7 +4208,7 @@
         <p:spPr>
           <a:xfrm>
             <a:off x="9052560" y="365760"/>
-            <a:ext cx="2743200" cy="365760"/>
+            <a:ext cx="2697480" cy="365760"/>
           </a:xfrm>
           <a:prstGeom prst="rect">
             <a:avLst/>
@@ -4298,8 +4298,8 @@
         </p:blipFill>
         <p:spPr>
           <a:xfrm>
-            <a:off x="1600200" y="1170432"/>
-            <a:ext cx="5212080" cy="5212080"/>
+            <a:off x="884255" y="1170432"/>
+            <a:ext cx="6643970" cy="5212080"/>
           </a:xfrm>
           <a:prstGeom prst="rect">
             <a:avLst/>
@@ -4524,7 +4524,7 @@
         <p:spPr>
           <a:xfrm>
             <a:off x="502920" y="310896"/>
-            <a:ext cx="914400" cy="365760"/>
+            <a:ext cx="640080" cy="365760"/>
           </a:xfrm>
           <a:prstGeom prst="rect">
             <a:avLst/>
@@ -4562,8 +4562,8 @@
         </p:nvSpPr>
         <p:spPr>
           <a:xfrm>
-            <a:off x="1234440" y="237744"/>
-            <a:ext cx="8778240" cy="731520"/>
+            <a:off x="1234440" y="201168"/>
+            <a:ext cx="7543800" cy="786384"/>
           </a:xfrm>
           <a:prstGeom prst="rect">
             <a:avLst/>
@@ -4582,7 +4582,7 @@
               </a:spcAft>
             </a:pPr>
             <a:r>
-              <a:rPr sz="2700" b="1">
+              <a:rPr sz="2400" b="1">
                 <a:solidFill>
                   <a:srgbClr val="10171C"/>
                 </a:solidFill>
@@ -4602,7 +4602,7 @@
         <p:spPr>
           <a:xfrm>
             <a:off x="9052560" y="365760"/>
-            <a:ext cx="2743200" cy="365760"/>
+            <a:ext cx="2697480" cy="365760"/>
           </a:xfrm>
           <a:prstGeom prst="rect">
             <a:avLst/>
@@ -4725,7 +4725,7 @@
         </p:nvGraphicFramePr>
         <p:xfrm>
           <a:off x="502920" y="1572768"/>
-          <a:ext cx="6705600" cy="2651760"/>
+          <a:ext cx="5669280" cy="2651760"/>
         </p:xfrm>
         <a:graphic>
           <a:graphicData uri="http://schemas.openxmlformats.org/drawingml/2006/table">
@@ -4735,8 +4735,8 @@
               </a:tblPr>
               <a:tblGrid>
                 <a:gridCol w="2926080"/>
-                <a:gridCol w="1889760"/>
-                <a:gridCol w="1889760"/>
+                <a:gridCol w="1371600"/>
+                <a:gridCol w="1371600"/>
               </a:tblGrid>
               <a:tr h="331470">
                 <a:tc>

--- a/sorghum_results_2026-09-20.pptx
+++ b/sorghum_results_2026-09-20.pptx
@@ -3118,7 +3118,7 @@
         </p:spPr>
         <p:txBody>
           <a:bodyPr wrap="square">
-            <a:spAutoFit/>
+            <a:normAutofit/>
           </a:bodyPr>
           <a:lstStyle/>
           <a:p>
@@ -3157,7 +3157,7 @@
         </p:spPr>
         <p:txBody>
           <a:bodyPr wrap="square">
-            <a:spAutoFit/>
+            <a:normAutofit/>
           </a:bodyPr>
           <a:lstStyle/>
           <a:p>
@@ -3196,7 +3196,7 @@
         </p:spPr>
         <p:txBody>
           <a:bodyPr wrap="square">
-            <a:spAutoFit/>
+            <a:normAutofit/>
           </a:bodyPr>
           <a:lstStyle/>
           <a:p>
@@ -3235,7 +3235,7 @@
         </p:spPr>
         <p:txBody>
           <a:bodyPr wrap="square">
-            <a:spAutoFit/>
+            <a:normAutofit/>
           </a:bodyPr>
           <a:lstStyle/>
           <a:p>
@@ -3274,7 +3274,7 @@
         </p:spPr>
         <p:txBody>
           <a:bodyPr wrap="square">
-            <a:spAutoFit/>
+            <a:normAutofit/>
           </a:bodyPr>
           <a:lstStyle/>
           <a:p>
@@ -3313,7 +3313,7 @@
         </p:spPr>
         <p:txBody>
           <a:bodyPr wrap="square">
-            <a:spAutoFit/>
+            <a:normAutofit/>
           </a:bodyPr>
           <a:lstStyle/>
           <a:p>
@@ -3352,7 +3352,7 @@
         </p:spPr>
         <p:txBody>
           <a:bodyPr wrap="square">
-            <a:spAutoFit/>
+            <a:normAutofit/>
           </a:bodyPr>
           <a:lstStyle/>
           <a:p>
@@ -3391,7 +3391,7 @@
         </p:spPr>
         <p:txBody>
           <a:bodyPr wrap="square">
-            <a:spAutoFit/>
+            <a:normAutofit/>
           </a:bodyPr>
           <a:lstStyle/>
           <a:p>
@@ -3430,7 +3430,7 @@
         </p:spPr>
         <p:txBody>
           <a:bodyPr wrap="square">
-            <a:spAutoFit/>
+            <a:normAutofit/>
           </a:bodyPr>
           <a:lstStyle/>
           <a:p>
@@ -3485,7 +3485,7 @@
         </p:nvSpPr>
         <p:spPr>
           <a:xfrm>
-            <a:off x="502920" y="310896"/>
+            <a:off x="502920" y="274320"/>
             <a:ext cx="640080" cy="365760"/>
           </a:xfrm>
           <a:prstGeom prst="rect">
@@ -3495,7 +3495,7 @@
         </p:spPr>
         <p:txBody>
           <a:bodyPr wrap="square">
-            <a:spAutoFit/>
+            <a:normAutofit/>
           </a:bodyPr>
           <a:lstStyle/>
           <a:p>
@@ -3524,8 +3524,8 @@
         </p:nvSpPr>
         <p:spPr>
           <a:xfrm>
-            <a:off x="1234440" y="201168"/>
-            <a:ext cx="7543800" cy="786384"/>
+            <a:off x="1234440" y="164592"/>
+            <a:ext cx="7543800" cy="932688"/>
           </a:xfrm>
           <a:prstGeom prst="rect">
             <a:avLst/>
@@ -3534,7 +3534,7 @@
         </p:spPr>
         <p:txBody>
           <a:bodyPr wrap="square">
-            <a:spAutoFit/>
+            <a:normAutofit/>
           </a:bodyPr>
           <a:lstStyle/>
           <a:p>
@@ -3544,7 +3544,7 @@
               </a:spcAft>
             </a:pPr>
             <a:r>
-              <a:rPr sz="2400" b="1">
+              <a:rPr sz="2200" b="1">
                 <a:solidFill>
                   <a:srgbClr val="10171C"/>
                 </a:solidFill>
@@ -3563,8 +3563,8 @@
         </p:nvSpPr>
         <p:spPr>
           <a:xfrm>
-            <a:off x="9052560" y="365760"/>
-            <a:ext cx="2697480" cy="365760"/>
+            <a:off x="9052560" y="292608"/>
+            <a:ext cx="2697480" cy="530352"/>
           </a:xfrm>
           <a:prstGeom prst="rect">
             <a:avLst/>
@@ -3573,7 +3573,7 @@
         </p:spPr>
         <p:txBody>
           <a:bodyPr wrap="square">
-            <a:spAutoFit/>
+            <a:normAutofit/>
           </a:bodyPr>
           <a:lstStyle/>
           <a:p>
@@ -3602,7 +3602,7 @@
         </p:nvSpPr>
         <p:spPr>
           <a:xfrm>
-            <a:off x="502920" y="969264"/>
+            <a:off x="502920" y="1188720"/>
             <a:ext cx="11155680" cy="27940"/>
           </a:xfrm>
           <a:prstGeom prst="rect">
@@ -3654,7 +3654,7 @@
         </p:blipFill>
         <p:spPr>
           <a:xfrm>
-            <a:off x="411480" y="1433945"/>
+            <a:off x="411480" y="1520813"/>
             <a:ext cx="11338560" cy="3350029"/>
           </a:xfrm>
           <a:prstGeom prst="rect">
@@ -3680,7 +3680,7 @@
         </p:spPr>
         <p:txBody>
           <a:bodyPr wrap="square">
-            <a:spAutoFit/>
+            <a:normAutofit/>
           </a:bodyPr>
           <a:lstStyle/>
           <a:p>
@@ -3751,7 +3751,7 @@
         </p:nvSpPr>
         <p:spPr>
           <a:xfrm>
-            <a:off x="502920" y="310896"/>
+            <a:off x="502920" y="274320"/>
             <a:ext cx="640080" cy="365760"/>
           </a:xfrm>
           <a:prstGeom prst="rect">
@@ -3761,7 +3761,7 @@
         </p:spPr>
         <p:txBody>
           <a:bodyPr wrap="square">
-            <a:spAutoFit/>
+            <a:normAutofit/>
           </a:bodyPr>
           <a:lstStyle/>
           <a:p>
@@ -3790,8 +3790,8 @@
         </p:nvSpPr>
         <p:spPr>
           <a:xfrm>
-            <a:off x="1234440" y="201168"/>
-            <a:ext cx="7543800" cy="786384"/>
+            <a:off x="1234440" y="164592"/>
+            <a:ext cx="7543800" cy="932688"/>
           </a:xfrm>
           <a:prstGeom prst="rect">
             <a:avLst/>
@@ -3800,7 +3800,7 @@
         </p:spPr>
         <p:txBody>
           <a:bodyPr wrap="square">
-            <a:spAutoFit/>
+            <a:normAutofit/>
           </a:bodyPr>
           <a:lstStyle/>
           <a:p>
@@ -3810,13 +3810,13 @@
               </a:spcAft>
             </a:pPr>
             <a:r>
-              <a:rPr sz="2400" b="1">
+              <a:rPr sz="2200" b="1">
                 <a:solidFill>
                   <a:srgbClr val="10171C"/>
                 </a:solidFill>
                 <a:latin typeface="Calibri"/>
               </a:rPr>
-              <a:t>Which points the model can and cannot predict</a:t>
+              <a:t>What the model cannot predict</a:t>
             </a:r>
           </a:p>
         </p:txBody>
@@ -3829,8 +3829,8 @@
         </p:nvSpPr>
         <p:spPr>
           <a:xfrm>
-            <a:off x="9052560" y="365760"/>
-            <a:ext cx="2697480" cy="365760"/>
+            <a:off x="9052560" y="292608"/>
+            <a:ext cx="2697480" cy="530352"/>
           </a:xfrm>
           <a:prstGeom prst="rect">
             <a:avLst/>
@@ -3839,7 +3839,7 @@
         </p:spPr>
         <p:txBody>
           <a:bodyPr wrap="square">
-            <a:spAutoFit/>
+            <a:normAutofit/>
           </a:bodyPr>
           <a:lstStyle/>
           <a:p>
@@ -3868,7 +3868,7 @@
         </p:nvSpPr>
         <p:spPr>
           <a:xfrm>
-            <a:off x="502920" y="969264"/>
+            <a:off x="502920" y="1188720"/>
             <a:ext cx="11155680" cy="27940"/>
           </a:xfrm>
           <a:prstGeom prst="rect">
@@ -3920,7 +3920,7 @@
         </p:blipFill>
         <p:spPr>
           <a:xfrm>
-            <a:off x="411480" y="1691640"/>
+            <a:off x="411480" y="1805940"/>
             <a:ext cx="7772400" cy="4114800"/>
           </a:xfrm>
           <a:prstGeom prst="rect">
@@ -3936,8 +3936,8 @@
         </p:nvSpPr>
         <p:spPr>
           <a:xfrm>
-            <a:off x="8458200" y="1325880"/>
-            <a:ext cx="3291840" cy="4754880"/>
+            <a:off x="8458200" y="1417320"/>
+            <a:ext cx="3291840" cy="4892040"/>
           </a:xfrm>
           <a:prstGeom prst="rect">
             <a:avLst/>
@@ -3946,7 +3946,7 @@
         </p:spPr>
         <p:txBody>
           <a:bodyPr wrap="square">
-            <a:spAutoFit/>
+            <a:normAutofit/>
           </a:bodyPr>
           <a:lstStyle/>
           <a:p>
@@ -4129,7 +4129,7 @@
         </p:nvSpPr>
         <p:spPr>
           <a:xfrm>
-            <a:off x="502920" y="310896"/>
+            <a:off x="502920" y="274320"/>
             <a:ext cx="640080" cy="365760"/>
           </a:xfrm>
           <a:prstGeom prst="rect">
@@ -4139,7 +4139,7 @@
         </p:spPr>
         <p:txBody>
           <a:bodyPr wrap="square">
-            <a:spAutoFit/>
+            <a:normAutofit/>
           </a:bodyPr>
           <a:lstStyle/>
           <a:p>
@@ -4168,8 +4168,8 @@
         </p:nvSpPr>
         <p:spPr>
           <a:xfrm>
-            <a:off x="1234440" y="201168"/>
-            <a:ext cx="7543800" cy="786384"/>
+            <a:off x="1234440" y="164592"/>
+            <a:ext cx="7543800" cy="932688"/>
           </a:xfrm>
           <a:prstGeom prst="rect">
             <a:avLst/>
@@ -4178,7 +4178,7 @@
         </p:spPr>
         <p:txBody>
           <a:bodyPr wrap="square">
-            <a:spAutoFit/>
+            <a:normAutofit/>
           </a:bodyPr>
           <a:lstStyle/>
           <a:p>
@@ -4188,13 +4188,13 @@
               </a:spcAft>
             </a:pPr>
             <a:r>
-              <a:rPr sz="2400" b="1">
+              <a:rPr sz="2200" b="1">
                 <a:solidFill>
                   <a:srgbClr val="10171C"/>
                 </a:solidFill>
                 <a:latin typeface="Calibri"/>
               </a:rPr>
-              <a:t>Ten cameras, one plant — only the input image changes</a:t>
+              <a:t>Ten cameras, one plant</a:t>
             </a:r>
           </a:p>
         </p:txBody>
@@ -4207,8 +4207,8 @@
         </p:nvSpPr>
         <p:spPr>
           <a:xfrm>
-            <a:off x="9052560" y="365760"/>
-            <a:ext cx="2697480" cy="365760"/>
+            <a:off x="9052560" y="292608"/>
+            <a:ext cx="2697480" cy="530352"/>
           </a:xfrm>
           <a:prstGeom prst="rect">
             <a:avLst/>
@@ -4217,7 +4217,7 @@
         </p:spPr>
         <p:txBody>
           <a:bodyPr wrap="square">
-            <a:spAutoFit/>
+            <a:normAutofit/>
           </a:bodyPr>
           <a:lstStyle/>
           <a:p>
@@ -4246,7 +4246,7 @@
         </p:nvSpPr>
         <p:spPr>
           <a:xfrm>
-            <a:off x="502920" y="969264"/>
+            <a:off x="502920" y="1188720"/>
             <a:ext cx="11155680" cy="27940"/>
           </a:xfrm>
           <a:prstGeom prst="rect">
@@ -4298,8 +4298,8 @@
         </p:blipFill>
         <p:spPr>
           <a:xfrm>
-            <a:off x="884255" y="1170432"/>
-            <a:ext cx="6643970" cy="5212080"/>
+            <a:off x="1000816" y="1353312"/>
+            <a:ext cx="6410848" cy="5029200"/>
           </a:xfrm>
           <a:prstGeom prst="rect">
             <a:avLst/>
@@ -4314,8 +4314,8 @@
         </p:nvSpPr>
         <p:spPr>
           <a:xfrm>
-            <a:off x="8275320" y="1325880"/>
-            <a:ext cx="3474720" cy="4846320"/>
+            <a:off x="8275320" y="1417320"/>
+            <a:ext cx="3474720" cy="4892040"/>
           </a:xfrm>
           <a:prstGeom prst="rect">
             <a:avLst/>
@@ -4324,7 +4324,7 @@
         </p:spPr>
         <p:txBody>
           <a:bodyPr wrap="square">
-            <a:spAutoFit/>
+            <a:normAutofit/>
           </a:bodyPr>
           <a:lstStyle/>
           <a:p>
@@ -4478,13 +4478,29 @@
               </a:spcAft>
             </a:pPr>
             <a:r>
-              <a:rPr sz="1050" b="0">
-                <a:solidFill>
-                  <a:srgbClr val="6B7C86"/>
+              <a:rPr sz="900" b="0">
+                <a:solidFill>
+                  <a:srgbClr val="3D4C55"/>
                 </a:solidFill>
                 <a:latin typeface="Calibri"/>
               </a:rPr>
-              <a:t>Clouds are drawn in the camera's own frame, so each sits in the same pose as the photograph beside it.</a:t>
+              <a:t/>
+            </a:r>
+          </a:p>
+          <a:p>
+            <a:pPr algn="l">
+              <a:spcAft>
+                <a:spcPts val="400"/>
+              </a:spcAft>
+            </a:pPr>
+            <a:r>
+              <a:rPr sz="1050" b="0">
+                <a:solidFill>
+                  <a:srgbClr val="6B7C86"/>
+                </a:solidFill>
+                <a:latin typeface="Calibri"/>
+              </a:rPr>
+              <a:t>Clouds are in the camera's own frame — same pose as the photograph.</a:t>
             </a:r>
           </a:p>
         </p:txBody>
@@ -4523,7 +4539,7 @@
         </p:nvSpPr>
         <p:spPr>
           <a:xfrm>
-            <a:off x="502920" y="310896"/>
+            <a:off x="502920" y="274320"/>
             <a:ext cx="640080" cy="365760"/>
           </a:xfrm>
           <a:prstGeom prst="rect">
@@ -4533,7 +4549,7 @@
         </p:spPr>
         <p:txBody>
           <a:bodyPr wrap="square">
-            <a:spAutoFit/>
+            <a:normAutofit/>
           </a:bodyPr>
           <a:lstStyle/>
           <a:p>
@@ -4562,8 +4578,8 @@
         </p:nvSpPr>
         <p:spPr>
           <a:xfrm>
-            <a:off x="1234440" y="201168"/>
-            <a:ext cx="7543800" cy="786384"/>
+            <a:off x="1234440" y="164592"/>
+            <a:ext cx="7543800" cy="932688"/>
           </a:xfrm>
           <a:prstGeom prst="rect">
             <a:avLst/>
@@ -4572,7 +4588,7 @@
         </p:spPr>
         <p:txBody>
           <a:bodyPr wrap="square">
-            <a:spAutoFit/>
+            <a:normAutofit/>
           </a:bodyPr>
           <a:lstStyle/>
           <a:p>
@@ -4582,13 +4598,13 @@
               </a:spcAft>
             </a:pPr>
             <a:r>
-              <a:rPr sz="2400" b="1">
+              <a:rPr sz="2200" b="1">
                 <a:solidFill>
                   <a:srgbClr val="10171C"/>
                 </a:solidFill>
                 <a:latin typeface="Calibri"/>
               </a:rPr>
-              <a:t>What the parameter head recovers, and what is next</a:t>
+              <a:t>Parameter head, and next steps</a:t>
             </a:r>
           </a:p>
         </p:txBody>
@@ -4601,8 +4617,8 @@
         </p:nvSpPr>
         <p:spPr>
           <a:xfrm>
-            <a:off x="9052560" y="365760"/>
-            <a:ext cx="2697480" cy="365760"/>
+            <a:off x="9052560" y="292608"/>
+            <a:ext cx="2697480" cy="530352"/>
           </a:xfrm>
           <a:prstGeom prst="rect">
             <a:avLst/>
@@ -4611,7 +4627,7 @@
         </p:spPr>
         <p:txBody>
           <a:bodyPr wrap="square">
-            <a:spAutoFit/>
+            <a:normAutofit/>
           </a:bodyPr>
           <a:lstStyle/>
           <a:p>
@@ -4640,7 +4656,7 @@
         </p:nvSpPr>
         <p:spPr>
           <a:xfrm>
-            <a:off x="502920" y="969264"/>
+            <a:off x="502920" y="1188720"/>
             <a:ext cx="11155680" cy="27940"/>
           </a:xfrm>
           <a:prstGeom prst="rect">
@@ -4684,8 +4700,8 @@
         </p:nvSpPr>
         <p:spPr>
           <a:xfrm>
-            <a:off x="502920" y="1188720"/>
-            <a:ext cx="5669280" cy="365760"/>
+            <a:off x="502920" y="1335024"/>
+            <a:ext cx="5669280" cy="457200"/>
           </a:xfrm>
           <a:prstGeom prst="rect">
             <a:avLst/>
@@ -4694,7 +4710,7 @@
         </p:spPr>
         <p:txBody>
           <a:bodyPr wrap="square">
-            <a:spAutoFit/>
+            <a:normAutofit/>
           </a:bodyPr>
           <a:lstStyle/>
           <a:p>
@@ -4710,7 +4726,7 @@
                 </a:solidFill>
                 <a:latin typeface="Calibri"/>
               </a:rPr>
-              <a:t>Skill per leaf field   (1 − MAE ÷ error of always predicting the mean)</a:t>
+              <a:t>Skill per leaf field   (1 = perfect, ≤ 0 = no better than the mean)</a:t>
             </a:r>
           </a:p>
         </p:txBody>
@@ -4724,7 +4740,7 @@
           <p:nvPr/>
         </p:nvGraphicFramePr>
         <p:xfrm>
-          <a:off x="502920" y="1572768"/>
+          <a:off x="502920" y="1773936"/>
           <a:ext cx="5669280" cy="2651760"/>
         </p:xfrm>
         <a:graphic>
@@ -5162,7 +5178,7 @@
         </p:nvSpPr>
         <p:spPr>
           <a:xfrm>
-            <a:off x="502920" y="4370832"/>
+            <a:off x="502920" y="4572000"/>
             <a:ext cx="5669280" cy="1737360"/>
           </a:xfrm>
           <a:prstGeom prst="rect">
@@ -5172,7 +5188,7 @@
         </p:spPr>
         <p:txBody>
           <a:bodyPr wrap="square">
-            <a:spAutoFit/>
+            <a:normAutofit/>
           </a:bodyPr>
           <a:lstStyle/>
           <a:p>
@@ -5217,8 +5233,8 @@
         </p:nvSpPr>
         <p:spPr>
           <a:xfrm>
-            <a:off x="6492240" y="1188720"/>
-            <a:ext cx="5212080" cy="4937760"/>
+            <a:off x="6492240" y="1389888"/>
+            <a:ext cx="5212080" cy="4800600"/>
           </a:xfrm>
           <a:prstGeom prst="rect">
             <a:avLst/>
@@ -5227,7 +5243,7 @@
         </p:spPr>
         <p:txBody>
           <a:bodyPr wrap="square">
-            <a:spAutoFit/>
+            <a:normAutofit/>
           </a:bodyPr>
           <a:lstStyle/>
           <a:p>

--- a/sorghum_results_2026-09-20.pptx
+++ b/sorghum_results_2026-09-20.pptx
@@ -4740,7 +4740,7 @@
           <p:nvPr/>
         </p:nvGraphicFramePr>
         <p:xfrm>
-          <a:off x="502920" y="1773936"/>
+          <a:off x="502920" y="1865376"/>
           <a:ext cx="5669280" cy="2651760"/>
         </p:xfrm>
         <a:graphic>

--- a/sorghum_results_2026-09-20.pptx
+++ b/sorghum_results_2026-09-20.pptx
@@ -10,6 +10,12 @@
     <p:sldId id="258" r:id="rId9"/>
     <p:sldId id="259" r:id="rId10"/>
     <p:sldId id="260" r:id="rId11"/>
+    <p:sldId id="261" r:id="rId12"/>
+    <p:sldId id="262" r:id="rId13"/>
+    <p:sldId id="263" r:id="rId14"/>
+    <p:sldId id="264" r:id="rId15"/>
+    <p:sldId id="265" r:id="rId16"/>
+    <p:sldId id="266" r:id="rId17"/>
   </p:sldIdLst>
   <p:sldSz cx="12191695" cy="6858000" type="screen4x3"/>
   <p:notesSz cx="6858000" cy="9144000"/>
@@ -3108,7 +3114,7 @@
         </p:nvSpPr>
         <p:spPr>
           <a:xfrm>
-            <a:off x="731520" y="1371600"/>
+            <a:off x="731520" y="1325880"/>
             <a:ext cx="10515600" cy="914400"/>
           </a:xfrm>
           <a:prstGeom prst="rect">
@@ -3147,8 +3153,8 @@
         </p:nvSpPr>
         <p:spPr>
           <a:xfrm>
-            <a:off x="731520" y="2286000"/>
-            <a:ext cx="10515600" cy="640080"/>
+            <a:off x="731520" y="2240280"/>
+            <a:ext cx="10515600" cy="731520"/>
           </a:xfrm>
           <a:prstGeom prst="rect">
             <a:avLst/>
@@ -3167,13 +3173,13 @@
               </a:spcAft>
             </a:pPr>
             <a:r>
-              <a:rPr sz="1900" b="0">
+              <a:rPr sz="1800" b="0">
                 <a:solidFill>
                   <a:srgbClr val="3D4C55"/>
                 </a:solidFill>
                 <a:latin typeface="Calibri"/>
               </a:rPr>
-              <a:t>Cross-modal generation, modality value-add, and scaling</a:t>
+              <a:t>A multi-modal masked autoencoder over RGB, depth, point cloud and procedural growth parameters</a:t>
             </a:r>
           </a:p>
         </p:txBody>
@@ -3186,7 +3192,7 @@
         </p:nvSpPr>
         <p:spPr>
           <a:xfrm>
-            <a:off x="731520" y="3200400"/>
+            <a:off x="731520" y="3154680"/>
             <a:ext cx="10515600" cy="457200"/>
           </a:xfrm>
           <a:prstGeom prst="rect">
@@ -3212,7 +3218,7 @@
                 </a:solidFill>
                 <a:latin typeface="Consolas"/>
               </a:rPr>
-              <a:t>Sorghum_15K validation split · held-out plants · 20 September 2026</a:t>
+              <a:t>Sorghum_15K · 15,000 plants · 20 September 2026</a:t>
             </a:r>
           </a:p>
         </p:txBody>
@@ -3225,7 +3231,7 @@
         </p:nvSpPr>
         <p:spPr>
           <a:xfrm>
-            <a:off x="731520" y="4206240"/>
+            <a:off x="731520" y="4160520"/>
             <a:ext cx="3474720" cy="548640"/>
           </a:xfrm>
           <a:prstGeom prst="rect">
@@ -3245,13 +3251,13 @@
               </a:spcAft>
             </a:pPr>
             <a:r>
-              <a:rPr sz="2600" b="1">
+              <a:rPr sz="2500" b="1">
                 <a:solidFill>
                   <a:srgbClr val="0C6F7D"/>
                 </a:solidFill>
                 <a:latin typeface="Consolas"/>
               </a:rPr>
-              <a:t>0.3439 → 0.2781</a:t>
+              <a:t>98.4%</a:t>
             </a:r>
           </a:p>
         </p:txBody>
@@ -3264,8 +3270,8 @@
         </p:nvSpPr>
         <p:spPr>
           <a:xfrm>
-            <a:off x="731520" y="4846320"/>
-            <a:ext cx="3474720" cy="731520"/>
+            <a:off x="731520" y="4800600"/>
+            <a:ext cx="3474720" cy="914400"/>
           </a:xfrm>
           <a:prstGeom prst="rect">
             <a:avLst/>
@@ -3290,7 +3296,7 @@
                 </a:solidFill>
                 <a:latin typeface="Calibri"/>
               </a:rPr>
-              <a:t>cross-modal generation after distillation</a:t>
+              <a:t>skill vs the average-plant floor, held-out test split</a:t>
             </a:r>
           </a:p>
         </p:txBody>
@@ -3303,7 +3309,7 @@
         </p:nvSpPr>
         <p:spPr>
           <a:xfrm>
-            <a:off x="4434840" y="4206240"/>
+            <a:off x="4434840" y="4160520"/>
             <a:ext cx="3474720" cy="548640"/>
           </a:xfrm>
           <a:prstGeom prst="rect">
@@ -3323,13 +3329,13 @@
               </a:spcAft>
             </a:pPr>
             <a:r>
-              <a:rPr sz="2600" b="1">
+              <a:rPr sz="2500" b="1">
                 <a:solidFill>
                   <a:srgbClr val="0C6F7D"/>
                 </a:solidFill>
                 <a:latin typeface="Consolas"/>
               </a:rPr>
-              <a:t>−65.5%</a:t>
+              <a:t>0.3439 → 0.2781</a:t>
             </a:r>
           </a:p>
         </p:txBody>
@@ -3342,8 +3348,8 @@
         </p:nvSpPr>
         <p:spPr>
           <a:xfrm>
-            <a:off x="4434840" y="4846320"/>
-            <a:ext cx="3474720" cy="731520"/>
+            <a:off x="4434840" y="4800600"/>
+            <a:ext cx="3474720" cy="914400"/>
           </a:xfrm>
           <a:prstGeom prst="rect">
             <a:avLst/>
@@ -3368,7 +3374,7 @@
                 </a:solidFill>
                 <a:latin typeface="Calibri"/>
               </a:rPr>
-              <a:t>PC chamfer from adding RGB + depth</a:t>
+              <a:t>cross-modal generation after distillation</a:t>
             </a:r>
           </a:p>
         </p:txBody>
@@ -3381,7 +3387,7 @@
         </p:nvSpPr>
         <p:spPr>
           <a:xfrm>
-            <a:off x="8138160" y="4206240"/>
+            <a:off x="8138160" y="4160520"/>
             <a:ext cx="3474720" cy="548640"/>
           </a:xfrm>
           <a:prstGeom prst="rect">
@@ -3401,7 +3407,7 @@
               </a:spcAft>
             </a:pPr>
             <a:r>
-              <a:rPr sz="2600" b="1">
+              <a:rPr sz="2500" b="1">
                 <a:solidFill>
                   <a:srgbClr val="9A5A16"/>
                 </a:solidFill>
@@ -3420,8 +3426,8 @@
         </p:nvSpPr>
         <p:spPr>
           <a:xfrm>
-            <a:off x="8138160" y="4846320"/>
-            <a:ext cx="3474720" cy="731520"/>
+            <a:off x="8138160" y="4800600"/>
+            <a:ext cx="3474720" cy="914400"/>
           </a:xfrm>
           <a:prstGeom prst="rect">
             <a:avLst/>
@@ -3459,7 +3465,7 @@
 </p:sld>
 </file>
 
-<file path=ppt/slides/slide2.xml><?xml version="1.0" encoding="utf-8"?>
+<file path=ppt/slides/slide10.xml><?xml version="1.0" encoding="utf-8"?>
 <p:sld xmlns:a="http://schemas.openxmlformats.org/drawingml/2006/main" xmlns:p="http://schemas.openxmlformats.org/presentationml/2006/main" xmlns:r="http://schemas.openxmlformats.org/officeDocument/2006/relationships">
   <p:cSld>
     <p:bg>
@@ -3511,7 +3517,7 @@
                 </a:solidFill>
                 <a:latin typeface="Consolas"/>
               </a:rPr>
-              <a:t>01</a:t>
+              <a:t>09</a:t>
             </a:r>
           </a:p>
         </p:txBody>
@@ -3550,7 +3556,7 @@
                 </a:solidFill>
                 <a:latin typeface="Calibri"/>
               </a:rPr>
-              <a:t>Results at equal compute</a:t>
+              <a:t>Ten cameras, one plant</a:t>
             </a:r>
           </a:p>
         </p:txBody>
@@ -3589,7 +3595,7 @@
                 </a:solidFill>
                 <a:latin typeface="Consolas"/>
               </a:rPr>
-              <a:t>every arm = 197,400 steps</a:t>
+              <a:t>generated from RGB alone</a:t>
             </a:r>
           </a:p>
         </p:txBody>
@@ -3640,7 +3646,7 @@
       </p:sp>
       <p:pic>
         <p:nvPicPr>
-          <p:cNvPr id="6" name="Picture 5" descr="charts.png"/>
+          <p:cNvPr id="6" name="Picture 5" descr="views.png"/>
           <p:cNvPicPr>
             <a:picLocks noChangeAspect="1"/>
           </p:cNvPicPr>
@@ -3654,8 +3660,8 @@
         </p:blipFill>
         <p:spPr>
           <a:xfrm>
-            <a:off x="411480" y="1520813"/>
-            <a:ext cx="11338560" cy="3350029"/>
+            <a:off x="1000816" y="1353312"/>
+            <a:ext cx="6410848" cy="5029200"/>
           </a:xfrm>
           <a:prstGeom prst="rect">
             <a:avLst/>
@@ -3670,8 +3676,8 @@
         </p:nvSpPr>
         <p:spPr>
           <a:xfrm>
-            <a:off x="502920" y="5166360"/>
-            <a:ext cx="11155680" cy="1371600"/>
+            <a:off x="8275320" y="1417320"/>
+            <a:ext cx="3474720" cy="4892040"/>
           </a:xfrm>
           <a:prstGeom prst="rect">
             <a:avLst/>
@@ -3696,23 +3702,167 @@
                 </a:solidFill>
                 <a:latin typeface="Calibri"/>
               </a:rPr>
-              <a:t>RGB buys −49.4% and depth a further 16 points — but adding the parametric stream gives back everything depth gained.</a:t>
-            </a:r>
-          </a:p>
-          <a:p>
-            <a:pPr algn="l">
-              <a:spcAft>
-                <a:spcPts val="400"/>
-              </a:spcAft>
-            </a:pPr>
-            <a:r>
-              <a:rPr sz="1250" b="0">
+              <a:t>The view index is an exact elevation ladder</a:t>
+            </a:r>
+          </a:p>
+          <a:p>
+            <a:pPr algn="l">
+              <a:spcAft>
+                <a:spcPts val="400"/>
+              </a:spcAft>
+            </a:pPr>
+            <a:r>
+              <a:rPr sz="1200" b="0">
                 <a:solidFill>
                   <a:srgbClr val="3D4C55"/>
                 </a:solidFill>
                 <a:latin typeface="Calibri"/>
               </a:rPr>
-              <a:t>10,000 and 10,500 plants differ by 5% in data, yet the larger arm scores 3.0% worse: those two runs are effectively a duplicate, so ≈3% is this pipeline's noise floor. That makes 3k→10k (−6.9%) only ~2.3× noise, while 25M→114M parameters buys −17.1%. At this budget, capacity pays better than data.</a:t>
+              <a:t>−0.9 + 0.2·index, from the camera matrix. All ten views share one point cloud and one parameter vector, so the answer never moves.</a:t>
+            </a:r>
+          </a:p>
+          <a:p>
+            <a:pPr algn="l">
+              <a:spcAft>
+                <a:spcPts val="400"/>
+              </a:spcAft>
+            </a:pPr>
+            <a:r>
+              <a:rPr sz="800" b="0">
+                <a:solidFill>
+                  <a:srgbClr val="3D4C55"/>
+                </a:solidFill>
+                <a:latin typeface="Calibri"/>
+              </a:rPr>
+              <a:t/>
+            </a:r>
+          </a:p>
+          <a:p>
+            <a:pPr algn="l">
+              <a:spcAft>
+                <a:spcPts val="400"/>
+              </a:spcAft>
+            </a:pPr>
+            <a:r>
+              <a:rPr sz="1400" b="1">
+                <a:solidFill>
+                  <a:srgbClr val="10171C"/>
+                </a:solidFill>
+                <a:latin typeface="Calibri"/>
+              </a:rPr>
+              <a:t>Chamfer traces a U</a:t>
+            </a:r>
+          </a:p>
+          <a:p>
+            <a:pPr algn="l">
+              <a:spcAft>
+                <a:spcPts val="400"/>
+              </a:spcAft>
+            </a:pPr>
+            <a:r>
+              <a:rPr sz="1200" b="0">
+                <a:solidFill>
+                  <a:srgbClr val="3D4C55"/>
+                </a:solidFill>
+                <a:latin typeface="Calibri"/>
+              </a:rPr>
+              <a:t>best side-on, worst looking steeply up or down — in both models.</a:t>
+            </a:r>
+          </a:p>
+          <a:p>
+            <a:pPr algn="l">
+              <a:spcAft>
+                <a:spcPts val="400"/>
+              </a:spcAft>
+            </a:pPr>
+            <a:r>
+              <a:rPr sz="800" b="0">
+                <a:solidFill>
+                  <a:srgbClr val="3D4C55"/>
+                </a:solidFill>
+                <a:latin typeface="Calibri"/>
+              </a:rPr>
+              <a:t/>
+            </a:r>
+          </a:p>
+          <a:p>
+            <a:pPr algn="l">
+              <a:spcAft>
+                <a:spcPts val="400"/>
+              </a:spcAft>
+            </a:pPr>
+            <a:r>
+              <a:rPr sz="1300" b="1">
+                <a:solidFill>
+                  <a:srgbClr val="0C6F7D"/>
+                </a:solidFill>
+                <a:latin typeface="Calibri"/>
+              </a:rPr>
+              <a:t>Distillation improves 9 of 10 views, mean −28.5%</a:t>
+            </a:r>
+          </a:p>
+          <a:p>
+            <a:pPr algn="l">
+              <a:spcAft>
+                <a:spcPts val="400"/>
+              </a:spcAft>
+            </a:pPr>
+            <a:r>
+              <a:rPr sz="1200" b="0">
+                <a:solidFill>
+                  <a:srgbClr val="3D4C55"/>
+                </a:solidFill>
+                <a:latin typeface="Calibri"/>
+              </a:rPr>
+              <a:t>…but best/worst spread widens 2.35× → 2.49×. It lowers the curve without flattening it, so it is not the lever for view robustness.</a:t>
+            </a:r>
+          </a:p>
+          <a:p>
+            <a:pPr algn="l">
+              <a:spcAft>
+                <a:spcPts val="400"/>
+              </a:spcAft>
+            </a:pPr>
+            <a:r>
+              <a:rPr sz="800" b="0">
+                <a:solidFill>
+                  <a:srgbClr val="3D4C55"/>
+                </a:solidFill>
+                <a:latin typeface="Calibri"/>
+              </a:rPr>
+              <a:t/>
+            </a:r>
+          </a:p>
+          <a:p>
+            <a:pPr algn="l">
+              <a:spcAft>
+                <a:spcPts val="400"/>
+              </a:spcAft>
+            </a:pPr>
+            <a:r>
+              <a:rPr sz="900" b="0">
+                <a:solidFill>
+                  <a:srgbClr val="3D4C55"/>
+                </a:solidFill>
+                <a:latin typeface="Calibri"/>
+              </a:rPr>
+              <a:t/>
+            </a:r>
+          </a:p>
+          <a:p>
+            <a:pPr algn="l">
+              <a:spcAft>
+                <a:spcPts val="400"/>
+              </a:spcAft>
+            </a:pPr>
+            <a:r>
+              <a:rPr sz="1050" b="0">
+                <a:solidFill>
+                  <a:srgbClr val="6B7C86"/>
+                </a:solidFill>
+                <a:latin typeface="Calibri"/>
+              </a:rPr>
+              <a:t>Clouds are in the camera's own frame — same pose as the photograph.</a:t>
             </a:r>
           </a:p>
         </p:txBody>
@@ -3725,7 +3875,7 @@
 </p:sld>
 </file>
 
-<file path=ppt/slides/slide3.xml><?xml version="1.0" encoding="utf-8"?>
+<file path=ppt/slides/slide11.xml><?xml version="1.0" encoding="utf-8"?>
 <p:sld xmlns:a="http://schemas.openxmlformats.org/drawingml/2006/main" xmlns:p="http://schemas.openxmlformats.org/presentationml/2006/main" xmlns:r="http://schemas.openxmlformats.org/officeDocument/2006/relationships">
   <p:cSld>
     <p:bg>
@@ -3777,795 +3927,7 @@
                 </a:solidFill>
                 <a:latin typeface="Consolas"/>
               </a:rPr>
-              <a:t>02</a:t>
-            </a:r>
-          </a:p>
-        </p:txBody>
-      </p:sp>
-      <p:sp>
-        <p:nvSpPr>
-          <p:cNvPr id="3" name="TextBox 2"/>
-          <p:cNvSpPr txBox="1"/>
-          <p:nvPr/>
-        </p:nvSpPr>
-        <p:spPr>
-          <a:xfrm>
-            <a:off x="1234440" y="164592"/>
-            <a:ext cx="7543800" cy="932688"/>
-          </a:xfrm>
-          <a:prstGeom prst="rect">
-            <a:avLst/>
-          </a:prstGeom>
-          <a:noFill/>
-        </p:spPr>
-        <p:txBody>
-          <a:bodyPr wrap="square">
-            <a:normAutofit/>
-          </a:bodyPr>
-          <a:lstStyle/>
-          <a:p>
-            <a:pPr algn="l">
-              <a:spcAft>
-                <a:spcPts val="400"/>
-              </a:spcAft>
-            </a:pPr>
-            <a:r>
-              <a:rPr sz="2200" b="1">
-                <a:solidFill>
-                  <a:srgbClr val="10171C"/>
-                </a:solidFill>
-                <a:latin typeface="Calibri"/>
-              </a:rPr>
-              <a:t>What the model cannot predict</a:t>
-            </a:r>
-          </a:p>
-        </p:txBody>
-      </p:sp>
-      <p:sp>
-        <p:nvSpPr>
-          <p:cNvPr id="4" name="TextBox 3"/>
-          <p:cNvSpPr txBox="1"/>
-          <p:nvPr/>
-        </p:nvSpPr>
-        <p:spPr>
-          <a:xfrm>
-            <a:off x="9052560" y="292608"/>
-            <a:ext cx="2697480" cy="530352"/>
-          </a:xfrm>
-          <a:prstGeom prst="rect">
-            <a:avLst/>
-          </a:prstGeom>
-          <a:noFill/>
-        </p:spPr>
-        <p:txBody>
-          <a:bodyPr wrap="square">
-            <a:normAutofit/>
-          </a:bodyPr>
-          <a:lstStyle/>
-          <a:p>
-            <a:pPr algn="r">
-              <a:spcAft>
-                <a:spcPts val="400"/>
-              </a:spcAft>
-            </a:pPr>
-            <a:r>
-              <a:rPr sz="1100" b="0">
-                <a:solidFill>
-                  <a:srgbClr val="6B7C86"/>
-                </a:solidFill>
-                <a:latin typeface="Consolas"/>
-              </a:rPr>
-              <a:t>ground truth, coloured by coverage</a:t>
-            </a:r>
-          </a:p>
-        </p:txBody>
-      </p:sp>
-      <p:sp>
-        <p:nvSpPr>
-          <p:cNvPr id="5" name="Rectangle 4"/>
-          <p:cNvSpPr/>
-          <p:nvPr/>
-        </p:nvSpPr>
-        <p:spPr>
-          <a:xfrm>
-            <a:off x="502920" y="1188720"/>
-            <a:ext cx="11155680" cy="27940"/>
-          </a:xfrm>
-          <a:prstGeom prst="rect">
-            <a:avLst/>
-          </a:prstGeom>
-          <a:solidFill>
-            <a:srgbClr val="10171C"/>
-          </a:solidFill>
-          <a:ln>
-            <a:noFill/>
-          </a:ln>
-          <a:effectLst/>
-        </p:spPr>
-        <p:style>
-          <a:lnRef idx="1">
-            <a:schemeClr val="accent1"/>
-          </a:lnRef>
-          <a:fillRef idx="3">
-            <a:schemeClr val="accent1"/>
-          </a:fillRef>
-          <a:effectRef idx="2">
-            <a:schemeClr val="accent1"/>
-          </a:effectRef>
-          <a:fontRef idx="minor">
-            <a:schemeClr val="lt1"/>
-          </a:fontRef>
-        </p:style>
-        <p:txBody>
-          <a:bodyPr rtlCol="0" anchor="ctr"/>
-          <a:lstStyle/>
-          <a:p>
-            <a:pPr algn="ctr"/>
-          </a:p>
-        </p:txBody>
-      </p:sp>
-      <p:pic>
-        <p:nvPicPr>
-          <p:cNvPr id="6" name="Picture 5" descr="coverage.png"/>
-          <p:cNvPicPr>
-            <a:picLocks noChangeAspect="1"/>
-          </p:cNvPicPr>
-          <p:nvPr/>
-        </p:nvPicPr>
-        <p:blipFill>
-          <a:blip r:embed="rId2"/>
-          <a:stretch>
-            <a:fillRect/>
-          </a:stretch>
-        </p:blipFill>
-        <p:spPr>
-          <a:xfrm>
-            <a:off x="411480" y="1805940"/>
-            <a:ext cx="7772400" cy="4114800"/>
-          </a:xfrm>
-          <a:prstGeom prst="rect">
-            <a:avLst/>
-          </a:prstGeom>
-        </p:spPr>
-      </p:pic>
-      <p:sp>
-        <p:nvSpPr>
-          <p:cNvPr id="7" name="TextBox 6"/>
-          <p:cNvSpPr txBox="1"/>
-          <p:nvPr/>
-        </p:nvSpPr>
-        <p:spPr>
-          <a:xfrm>
-            <a:off x="8458200" y="1417320"/>
-            <a:ext cx="3291840" cy="4892040"/>
-          </a:xfrm>
-          <a:prstGeom prst="rect">
-            <a:avLst/>
-          </a:prstGeom>
-          <a:noFill/>
-        </p:spPr>
-        <p:txBody>
-          <a:bodyPr wrap="square">
-            <a:normAutofit/>
-          </a:bodyPr>
-          <a:lstStyle/>
-          <a:p>
-            <a:pPr algn="l">
-              <a:spcAft>
-                <a:spcPts val="400"/>
-              </a:spcAft>
-            </a:pPr>
-            <a:r>
-              <a:rPr sz="2000" b="1">
-                <a:solidFill>
-                  <a:srgbClr val="34A35C"/>
-                </a:solidFill>
-                <a:latin typeface="Calibri"/>
-              </a:rPr>
-              <a:t>Green</a:t>
-            </a:r>
-          </a:p>
-          <a:p>
-            <a:pPr algn="l">
-              <a:spcAft>
-                <a:spcPts val="400"/>
-              </a:spcAft>
-            </a:pPr>
-            <a:r>
-              <a:rPr sz="1250" b="0">
-                <a:solidFill>
-                  <a:srgbClr val="3D4C55"/>
-                </a:solidFill>
-                <a:latin typeface="Calibri"/>
-              </a:rPr>
-              <a:t>a prediction lands within 0.03 of this ground-truth point.</a:t>
-            </a:r>
-          </a:p>
-          <a:p>
-            <a:pPr algn="l">
-              <a:spcAft>
-                <a:spcPts val="400"/>
-              </a:spcAft>
-            </a:pPr>
-            <a:r>
-              <a:rPr sz="800" b="0">
-                <a:solidFill>
-                  <a:srgbClr val="3D4C55"/>
-                </a:solidFill>
-                <a:latin typeface="Calibri"/>
-              </a:rPr>
-              <a:t/>
-            </a:r>
-          </a:p>
-          <a:p>
-            <a:pPr algn="l">
-              <a:spcAft>
-                <a:spcPts val="400"/>
-              </a:spcAft>
-            </a:pPr>
-            <a:r>
-              <a:rPr sz="2000" b="1">
-                <a:solidFill>
-                  <a:srgbClr val="E0493C"/>
-                </a:solidFill>
-                <a:latin typeface="Calibri"/>
-              </a:rPr>
-              <a:t>Red</a:t>
-            </a:r>
-          </a:p>
-          <a:p>
-            <a:pPr algn="l">
-              <a:spcAft>
-                <a:spcPts val="400"/>
-              </a:spcAft>
-            </a:pPr>
-            <a:r>
-              <a:rPr sz="1250" b="0">
-                <a:solidFill>
-                  <a:srgbClr val="3D4C55"/>
-                </a:solidFill>
-                <a:latin typeface="Calibri"/>
-              </a:rPr>
-              <a:t>nothing does — geometry the reconstruction never reached.</a:t>
-            </a:r>
-          </a:p>
-          <a:p>
-            <a:pPr algn="l">
-              <a:spcAft>
-                <a:spcPts val="400"/>
-              </a:spcAft>
-            </a:pPr>
-            <a:r>
-              <a:rPr sz="1000" b="0">
-                <a:solidFill>
-                  <a:srgbClr val="3D4C55"/>
-                </a:solidFill>
-                <a:latin typeface="Calibri"/>
-              </a:rPr>
-              <a:t/>
-            </a:r>
-          </a:p>
-          <a:p>
-            <a:pPr algn="l">
-              <a:spcAft>
-                <a:spcPts val="400"/>
-              </a:spcAft>
-            </a:pPr>
-            <a:r>
-              <a:rPr sz="1250" b="0">
-                <a:solidFill>
-                  <a:srgbClr val="3D4C55"/>
-                </a:solidFill>
-                <a:latin typeface="Calibri"/>
-              </a:rPr>
-              <a:t>Distillation closes the interior of the plant first. Thin leaf tips stay red longest in both models — they are the hardest geometry in the dataset.</a:t>
-            </a:r>
-          </a:p>
-          <a:p>
-            <a:pPr algn="l">
-              <a:spcAft>
-                <a:spcPts val="400"/>
-              </a:spcAft>
-            </a:pPr>
-            <a:r>
-              <a:rPr sz="800" b="0">
-                <a:solidFill>
-                  <a:srgbClr val="3D4C55"/>
-                </a:solidFill>
-                <a:latin typeface="Calibri"/>
-              </a:rPr>
-              <a:t/>
-            </a:r>
-          </a:p>
-          <a:p>
-            <a:pPr algn="l">
-              <a:spcAft>
-                <a:spcPts val="400"/>
-              </a:spcAft>
-            </a:pPr>
-            <a:r>
-              <a:rPr sz="1050" b="0">
-                <a:solidFill>
-                  <a:srgbClr val="6B7C86"/>
-                </a:solidFill>
-                <a:latin typeface="Calibri"/>
-              </a:rPr>
-              <a:t>Threshold 0.03, not the 0.01 training default: at 0.01 about 80% of every cloud is red in both models, which is true but shows nothing. Chamfer reports a SQUARED distance, so 0.0028 is an RMS error near 0.053.</a:t>
-            </a:r>
-          </a:p>
-        </p:txBody>
-      </p:sp>
-    </p:spTree>
-  </p:cSld>
-  <p:clrMapOvr>
-    <a:masterClrMapping/>
-  </p:clrMapOvr>
-</p:sld>
-</file>
-
-<file path=ppt/slides/slide4.xml><?xml version="1.0" encoding="utf-8"?>
-<p:sld xmlns:a="http://schemas.openxmlformats.org/drawingml/2006/main" xmlns:p="http://schemas.openxmlformats.org/presentationml/2006/main" xmlns:r="http://schemas.openxmlformats.org/officeDocument/2006/relationships">
-  <p:cSld>
-    <p:bg>
-      <p:bgPr>
-        <a:solidFill>
-          <a:srgbClr val="FFFFFF"/>
-        </a:solidFill>
-        <a:effectLst/>
-      </p:bgPr>
-    </p:bg>
-    <p:spTree>
-      <p:nvGrpSpPr>
-        <p:cNvPr id="1" name=""/>
-        <p:cNvGrpSpPr/>
-        <p:nvPr/>
-      </p:nvGrpSpPr>
-      <p:grpSpPr/>
-      <p:sp>
-        <p:nvSpPr>
-          <p:cNvPr id="2" name="TextBox 1"/>
-          <p:cNvSpPr txBox="1"/>
-          <p:nvPr/>
-        </p:nvSpPr>
-        <p:spPr>
-          <a:xfrm>
-            <a:off x="502920" y="274320"/>
-            <a:ext cx="640080" cy="365760"/>
-          </a:xfrm>
-          <a:prstGeom prst="rect">
-            <a:avLst/>
-          </a:prstGeom>
-          <a:noFill/>
-        </p:spPr>
-        <p:txBody>
-          <a:bodyPr wrap="square">
-            <a:normAutofit/>
-          </a:bodyPr>
-          <a:lstStyle/>
-          <a:p>
-            <a:pPr algn="l">
-              <a:spcAft>
-                <a:spcPts val="400"/>
-              </a:spcAft>
-            </a:pPr>
-            <a:r>
-              <a:rPr sz="1300" b="1">
-                <a:solidFill>
-                  <a:srgbClr val="0C6F7D"/>
-                </a:solidFill>
-                <a:latin typeface="Consolas"/>
-              </a:rPr>
-              <a:t>03</a:t>
-            </a:r>
-          </a:p>
-        </p:txBody>
-      </p:sp>
-      <p:sp>
-        <p:nvSpPr>
-          <p:cNvPr id="3" name="TextBox 2"/>
-          <p:cNvSpPr txBox="1"/>
-          <p:nvPr/>
-        </p:nvSpPr>
-        <p:spPr>
-          <a:xfrm>
-            <a:off x="1234440" y="164592"/>
-            <a:ext cx="7543800" cy="932688"/>
-          </a:xfrm>
-          <a:prstGeom prst="rect">
-            <a:avLst/>
-          </a:prstGeom>
-          <a:noFill/>
-        </p:spPr>
-        <p:txBody>
-          <a:bodyPr wrap="square">
-            <a:normAutofit/>
-          </a:bodyPr>
-          <a:lstStyle/>
-          <a:p>
-            <a:pPr algn="l">
-              <a:spcAft>
-                <a:spcPts val="400"/>
-              </a:spcAft>
-            </a:pPr>
-            <a:r>
-              <a:rPr sz="2200" b="1">
-                <a:solidFill>
-                  <a:srgbClr val="10171C"/>
-                </a:solidFill>
-                <a:latin typeface="Calibri"/>
-              </a:rPr>
-              <a:t>Ten cameras, one plant</a:t>
-            </a:r>
-          </a:p>
-        </p:txBody>
-      </p:sp>
-      <p:sp>
-        <p:nvSpPr>
-          <p:cNvPr id="4" name="TextBox 3"/>
-          <p:cNvSpPr txBox="1"/>
-          <p:nvPr/>
-        </p:nvSpPr>
-        <p:spPr>
-          <a:xfrm>
-            <a:off x="9052560" y="292608"/>
-            <a:ext cx="2697480" cy="530352"/>
-          </a:xfrm>
-          <a:prstGeom prst="rect">
-            <a:avLst/>
-          </a:prstGeom>
-          <a:noFill/>
-        </p:spPr>
-        <p:txBody>
-          <a:bodyPr wrap="square">
-            <a:normAutofit/>
-          </a:bodyPr>
-          <a:lstStyle/>
-          <a:p>
-            <a:pPr algn="r">
-              <a:spcAft>
-                <a:spcPts val="400"/>
-              </a:spcAft>
-            </a:pPr>
-            <a:r>
-              <a:rPr sz="1100" b="0">
-                <a:solidFill>
-                  <a:srgbClr val="6B7C86"/>
-                </a:solidFill>
-                <a:latin typeface="Consolas"/>
-              </a:rPr>
-              <a:t>generated from RGB alone</a:t>
-            </a:r>
-          </a:p>
-        </p:txBody>
-      </p:sp>
-      <p:sp>
-        <p:nvSpPr>
-          <p:cNvPr id="5" name="Rectangle 4"/>
-          <p:cNvSpPr/>
-          <p:nvPr/>
-        </p:nvSpPr>
-        <p:spPr>
-          <a:xfrm>
-            <a:off x="502920" y="1188720"/>
-            <a:ext cx="11155680" cy="27940"/>
-          </a:xfrm>
-          <a:prstGeom prst="rect">
-            <a:avLst/>
-          </a:prstGeom>
-          <a:solidFill>
-            <a:srgbClr val="10171C"/>
-          </a:solidFill>
-          <a:ln>
-            <a:noFill/>
-          </a:ln>
-          <a:effectLst/>
-        </p:spPr>
-        <p:style>
-          <a:lnRef idx="1">
-            <a:schemeClr val="accent1"/>
-          </a:lnRef>
-          <a:fillRef idx="3">
-            <a:schemeClr val="accent1"/>
-          </a:fillRef>
-          <a:effectRef idx="2">
-            <a:schemeClr val="accent1"/>
-          </a:effectRef>
-          <a:fontRef idx="minor">
-            <a:schemeClr val="lt1"/>
-          </a:fontRef>
-        </p:style>
-        <p:txBody>
-          <a:bodyPr rtlCol="0" anchor="ctr"/>
-          <a:lstStyle/>
-          <a:p>
-            <a:pPr algn="ctr"/>
-          </a:p>
-        </p:txBody>
-      </p:sp>
-      <p:pic>
-        <p:nvPicPr>
-          <p:cNvPr id="6" name="Picture 5" descr="views.png"/>
-          <p:cNvPicPr>
-            <a:picLocks noChangeAspect="1"/>
-          </p:cNvPicPr>
-          <p:nvPr/>
-        </p:nvPicPr>
-        <p:blipFill>
-          <a:blip r:embed="rId2"/>
-          <a:stretch>
-            <a:fillRect/>
-          </a:stretch>
-        </p:blipFill>
-        <p:spPr>
-          <a:xfrm>
-            <a:off x="1000816" y="1353312"/>
-            <a:ext cx="6410848" cy="5029200"/>
-          </a:xfrm>
-          <a:prstGeom prst="rect">
-            <a:avLst/>
-          </a:prstGeom>
-        </p:spPr>
-      </p:pic>
-      <p:sp>
-        <p:nvSpPr>
-          <p:cNvPr id="7" name="TextBox 6"/>
-          <p:cNvSpPr txBox="1"/>
-          <p:nvPr/>
-        </p:nvSpPr>
-        <p:spPr>
-          <a:xfrm>
-            <a:off x="8275320" y="1417320"/>
-            <a:ext cx="3474720" cy="4892040"/>
-          </a:xfrm>
-          <a:prstGeom prst="rect">
-            <a:avLst/>
-          </a:prstGeom>
-          <a:noFill/>
-        </p:spPr>
-        <p:txBody>
-          <a:bodyPr wrap="square">
-            <a:normAutofit/>
-          </a:bodyPr>
-          <a:lstStyle/>
-          <a:p>
-            <a:pPr algn="l">
-              <a:spcAft>
-                <a:spcPts val="400"/>
-              </a:spcAft>
-            </a:pPr>
-            <a:r>
-              <a:rPr sz="1400" b="1">
-                <a:solidFill>
-                  <a:srgbClr val="10171C"/>
-                </a:solidFill>
-                <a:latin typeface="Calibri"/>
-              </a:rPr>
-              <a:t>The view index is an exact elevation ladder</a:t>
-            </a:r>
-          </a:p>
-          <a:p>
-            <a:pPr algn="l">
-              <a:spcAft>
-                <a:spcPts val="400"/>
-              </a:spcAft>
-            </a:pPr>
-            <a:r>
-              <a:rPr sz="1200" b="0">
-                <a:solidFill>
-                  <a:srgbClr val="3D4C55"/>
-                </a:solidFill>
-                <a:latin typeface="Calibri"/>
-              </a:rPr>
-              <a:t>−0.9 + 0.2·index, from the camera matrix. All ten views share one point cloud and one parameter vector, so the answer never moves.</a:t>
-            </a:r>
-          </a:p>
-          <a:p>
-            <a:pPr algn="l">
-              <a:spcAft>
-                <a:spcPts val="400"/>
-              </a:spcAft>
-            </a:pPr>
-            <a:r>
-              <a:rPr sz="800" b="0">
-                <a:solidFill>
-                  <a:srgbClr val="3D4C55"/>
-                </a:solidFill>
-                <a:latin typeface="Calibri"/>
-              </a:rPr>
-              <a:t/>
-            </a:r>
-          </a:p>
-          <a:p>
-            <a:pPr algn="l">
-              <a:spcAft>
-                <a:spcPts val="400"/>
-              </a:spcAft>
-            </a:pPr>
-            <a:r>
-              <a:rPr sz="1400" b="1">
-                <a:solidFill>
-                  <a:srgbClr val="10171C"/>
-                </a:solidFill>
-                <a:latin typeface="Calibri"/>
-              </a:rPr>
-              <a:t>Chamfer traces a U</a:t>
-            </a:r>
-          </a:p>
-          <a:p>
-            <a:pPr algn="l">
-              <a:spcAft>
-                <a:spcPts val="400"/>
-              </a:spcAft>
-            </a:pPr>
-            <a:r>
-              <a:rPr sz="1200" b="0">
-                <a:solidFill>
-                  <a:srgbClr val="3D4C55"/>
-                </a:solidFill>
-                <a:latin typeface="Calibri"/>
-              </a:rPr>
-              <a:t>best side-on, worst looking steeply up or down — in both models.</a:t>
-            </a:r>
-          </a:p>
-          <a:p>
-            <a:pPr algn="l">
-              <a:spcAft>
-                <a:spcPts val="400"/>
-              </a:spcAft>
-            </a:pPr>
-            <a:r>
-              <a:rPr sz="800" b="0">
-                <a:solidFill>
-                  <a:srgbClr val="3D4C55"/>
-                </a:solidFill>
-                <a:latin typeface="Calibri"/>
-              </a:rPr>
-              <a:t/>
-            </a:r>
-          </a:p>
-          <a:p>
-            <a:pPr algn="l">
-              <a:spcAft>
-                <a:spcPts val="400"/>
-              </a:spcAft>
-            </a:pPr>
-            <a:r>
-              <a:rPr sz="1300" b="1">
-                <a:solidFill>
-                  <a:srgbClr val="0C6F7D"/>
-                </a:solidFill>
-                <a:latin typeface="Calibri"/>
-              </a:rPr>
-              <a:t>Distillation improves 9 of 10 views, mean −28.5%</a:t>
-            </a:r>
-          </a:p>
-          <a:p>
-            <a:pPr algn="l">
-              <a:spcAft>
-                <a:spcPts val="400"/>
-              </a:spcAft>
-            </a:pPr>
-            <a:r>
-              <a:rPr sz="1200" b="0">
-                <a:solidFill>
-                  <a:srgbClr val="3D4C55"/>
-                </a:solidFill>
-                <a:latin typeface="Calibri"/>
-              </a:rPr>
-              <a:t>…but best/worst spread widens 2.35× → 2.49×. It lowers the curve without flattening it, so it is not the lever for view robustness.</a:t>
-            </a:r>
-          </a:p>
-          <a:p>
-            <a:pPr algn="l">
-              <a:spcAft>
-                <a:spcPts val="400"/>
-              </a:spcAft>
-            </a:pPr>
-            <a:r>
-              <a:rPr sz="800" b="0">
-                <a:solidFill>
-                  <a:srgbClr val="3D4C55"/>
-                </a:solidFill>
-                <a:latin typeface="Calibri"/>
-              </a:rPr>
-              <a:t/>
-            </a:r>
-          </a:p>
-          <a:p>
-            <a:pPr algn="l">
-              <a:spcAft>
-                <a:spcPts val="400"/>
-              </a:spcAft>
-            </a:pPr>
-            <a:r>
-              <a:rPr sz="900" b="0">
-                <a:solidFill>
-                  <a:srgbClr val="3D4C55"/>
-                </a:solidFill>
-                <a:latin typeface="Calibri"/>
-              </a:rPr>
-              <a:t/>
-            </a:r>
-          </a:p>
-          <a:p>
-            <a:pPr algn="l">
-              <a:spcAft>
-                <a:spcPts val="400"/>
-              </a:spcAft>
-            </a:pPr>
-            <a:r>
-              <a:rPr sz="1050" b="0">
-                <a:solidFill>
-                  <a:srgbClr val="6B7C86"/>
-                </a:solidFill>
-                <a:latin typeface="Calibri"/>
-              </a:rPr>
-              <a:t>Clouds are in the camera's own frame — same pose as the photograph.</a:t>
-            </a:r>
-          </a:p>
-        </p:txBody>
-      </p:sp>
-    </p:spTree>
-  </p:cSld>
-  <p:clrMapOvr>
-    <a:masterClrMapping/>
-  </p:clrMapOvr>
-</p:sld>
-</file>
-
-<file path=ppt/slides/slide5.xml><?xml version="1.0" encoding="utf-8"?>
-<p:sld xmlns:a="http://schemas.openxmlformats.org/drawingml/2006/main" xmlns:p="http://schemas.openxmlformats.org/presentationml/2006/main" xmlns:r="http://schemas.openxmlformats.org/officeDocument/2006/relationships">
-  <p:cSld>
-    <p:bg>
-      <p:bgPr>
-        <a:solidFill>
-          <a:srgbClr val="FFFFFF"/>
-        </a:solidFill>
-        <a:effectLst/>
-      </p:bgPr>
-    </p:bg>
-    <p:spTree>
-      <p:nvGrpSpPr>
-        <p:cNvPr id="1" name=""/>
-        <p:cNvGrpSpPr/>
-        <p:nvPr/>
-      </p:nvGrpSpPr>
-      <p:grpSpPr/>
-      <p:sp>
-        <p:nvSpPr>
-          <p:cNvPr id="2" name="TextBox 1"/>
-          <p:cNvSpPr txBox="1"/>
-          <p:nvPr/>
-        </p:nvSpPr>
-        <p:spPr>
-          <a:xfrm>
-            <a:off x="502920" y="274320"/>
-            <a:ext cx="640080" cy="365760"/>
-          </a:xfrm>
-          <a:prstGeom prst="rect">
-            <a:avLst/>
-          </a:prstGeom>
-          <a:noFill/>
-        </p:spPr>
-        <p:txBody>
-          <a:bodyPr wrap="square">
-            <a:normAutofit/>
-          </a:bodyPr>
-          <a:lstStyle/>
-          <a:p>
-            <a:pPr algn="l">
-              <a:spcAft>
-                <a:spcPts val="400"/>
-              </a:spcAft>
-            </a:pPr>
-            <a:r>
-              <a:rPr sz="1300" b="1">
-                <a:solidFill>
-                  <a:srgbClr val="0C6F7D"/>
-                </a:solidFill>
-                <a:latin typeface="Consolas"/>
-              </a:rPr>
-              <a:t>04</a:t>
+              <a:t>10</a:t>
             </a:r>
           </a:p>
         </p:txBody>
@@ -5400,6 +4762,3851 @@
 </p:sld>
 </file>
 
+<file path=ppt/slides/slide2.xml><?xml version="1.0" encoding="utf-8"?>
+<p:sld xmlns:a="http://schemas.openxmlformats.org/drawingml/2006/main" xmlns:p="http://schemas.openxmlformats.org/presentationml/2006/main" xmlns:r="http://schemas.openxmlformats.org/officeDocument/2006/relationships">
+  <p:cSld>
+    <p:bg>
+      <p:bgPr>
+        <a:solidFill>
+          <a:srgbClr val="FFFFFF"/>
+        </a:solidFill>
+        <a:effectLst/>
+      </p:bgPr>
+    </p:bg>
+    <p:spTree>
+      <p:nvGrpSpPr>
+        <p:cNvPr id="1" name=""/>
+        <p:cNvGrpSpPr/>
+        <p:nvPr/>
+      </p:nvGrpSpPr>
+      <p:grpSpPr/>
+      <p:sp>
+        <p:nvSpPr>
+          <p:cNvPr id="2" name="TextBox 1"/>
+          <p:cNvSpPr txBox="1"/>
+          <p:nvPr/>
+        </p:nvSpPr>
+        <p:spPr>
+          <a:xfrm>
+            <a:off x="502920" y="274320"/>
+            <a:ext cx="640080" cy="365760"/>
+          </a:xfrm>
+          <a:prstGeom prst="rect">
+            <a:avLst/>
+          </a:prstGeom>
+          <a:noFill/>
+        </p:spPr>
+        <p:txBody>
+          <a:bodyPr wrap="square">
+            <a:normAutofit/>
+          </a:bodyPr>
+          <a:lstStyle/>
+          <a:p>
+            <a:pPr algn="l">
+              <a:spcAft>
+                <a:spcPts val="400"/>
+              </a:spcAft>
+            </a:pPr>
+            <a:r>
+              <a:rPr sz="1300" b="1">
+                <a:solidFill>
+                  <a:srgbClr val="0C6F7D"/>
+                </a:solidFill>
+                <a:latin typeface="Consolas"/>
+              </a:rPr>
+              <a:t>01</a:t>
+            </a:r>
+          </a:p>
+        </p:txBody>
+      </p:sp>
+      <p:sp>
+        <p:nvSpPr>
+          <p:cNvPr id="3" name="TextBox 2"/>
+          <p:cNvSpPr txBox="1"/>
+          <p:nvPr/>
+        </p:nvSpPr>
+        <p:spPr>
+          <a:xfrm>
+            <a:off x="1234440" y="164592"/>
+            <a:ext cx="7543800" cy="932688"/>
+          </a:xfrm>
+          <a:prstGeom prst="rect">
+            <a:avLst/>
+          </a:prstGeom>
+          <a:noFill/>
+        </p:spPr>
+        <p:txBody>
+          <a:bodyPr wrap="square">
+            <a:normAutofit/>
+          </a:bodyPr>
+          <a:lstStyle/>
+          <a:p>
+            <a:pPr algn="l">
+              <a:spcAft>
+                <a:spcPts val="400"/>
+              </a:spcAft>
+            </a:pPr>
+            <a:r>
+              <a:rPr sz="2200" b="1">
+                <a:solidFill>
+                  <a:srgbClr val="10171C"/>
+                </a:solidFill>
+                <a:latin typeface="Calibri"/>
+              </a:rPr>
+              <a:t>The problem</a:t>
+            </a:r>
+          </a:p>
+        </p:txBody>
+      </p:sp>
+      <p:sp>
+        <p:nvSpPr>
+          <p:cNvPr id="4" name="TextBox 3"/>
+          <p:cNvSpPr txBox="1"/>
+          <p:nvPr/>
+        </p:nvSpPr>
+        <p:spPr>
+          <a:xfrm>
+            <a:off x="9052560" y="292608"/>
+            <a:ext cx="2697480" cy="530352"/>
+          </a:xfrm>
+          <a:prstGeom prst="rect">
+            <a:avLst/>
+          </a:prstGeom>
+          <a:noFill/>
+        </p:spPr>
+        <p:txBody>
+          <a:bodyPr wrap="square">
+            <a:normAutofit/>
+          </a:bodyPr>
+          <a:lstStyle/>
+          <a:p>
+            <a:pPr algn="r">
+              <a:spcAft>
+                <a:spcPts val="400"/>
+              </a:spcAft>
+            </a:pPr>
+            <a:r>
+              <a:rPr sz="1100" b="0">
+                <a:solidFill>
+                  <a:srgbClr val="6B7C86"/>
+                </a:solidFill>
+                <a:latin typeface="Consolas"/>
+              </a:rPr>
+              <a:t>why a multi-modal MAE</a:t>
+            </a:r>
+          </a:p>
+        </p:txBody>
+      </p:sp>
+      <p:sp>
+        <p:nvSpPr>
+          <p:cNvPr id="5" name="Rectangle 4"/>
+          <p:cNvSpPr/>
+          <p:nvPr/>
+        </p:nvSpPr>
+        <p:spPr>
+          <a:xfrm>
+            <a:off x="502920" y="1188720"/>
+            <a:ext cx="11155680" cy="27940"/>
+          </a:xfrm>
+          <a:prstGeom prst="rect">
+            <a:avLst/>
+          </a:prstGeom>
+          <a:solidFill>
+            <a:srgbClr val="10171C"/>
+          </a:solidFill>
+          <a:ln>
+            <a:noFill/>
+          </a:ln>
+          <a:effectLst/>
+        </p:spPr>
+        <p:style>
+          <a:lnRef idx="1">
+            <a:schemeClr val="accent1"/>
+          </a:lnRef>
+          <a:fillRef idx="3">
+            <a:schemeClr val="accent1"/>
+          </a:fillRef>
+          <a:effectRef idx="2">
+            <a:schemeClr val="accent1"/>
+          </a:effectRef>
+          <a:fontRef idx="minor">
+            <a:schemeClr val="lt1"/>
+          </a:fontRef>
+        </p:style>
+        <p:txBody>
+          <a:bodyPr rtlCol="0" anchor="ctr"/>
+          <a:lstStyle/>
+          <a:p>
+            <a:pPr algn="ctr"/>
+          </a:p>
+        </p:txBody>
+      </p:sp>
+      <p:sp>
+        <p:nvSpPr>
+          <p:cNvPr id="6" name="TextBox 5"/>
+          <p:cNvSpPr txBox="1"/>
+          <p:nvPr/>
+        </p:nvSpPr>
+        <p:spPr>
+          <a:xfrm>
+            <a:off x="502920" y="1417320"/>
+            <a:ext cx="5486400" cy="4754880"/>
+          </a:xfrm>
+          <a:prstGeom prst="rect">
+            <a:avLst/>
+          </a:prstGeom>
+          <a:noFill/>
+        </p:spPr>
+        <p:txBody>
+          <a:bodyPr wrap="square">
+            <a:normAutofit/>
+          </a:bodyPr>
+          <a:lstStyle/>
+          <a:p>
+            <a:pPr algn="l">
+              <a:spcAft>
+                <a:spcPts val="700"/>
+              </a:spcAft>
+            </a:pPr>
+            <a:r>
+              <a:rPr sz="1350" b="0">
+                <a:solidFill>
+                  <a:srgbClr val="3D4C55"/>
+                </a:solidFill>
+                <a:latin typeface="Calibri"/>
+              </a:rPr>
+              <a:t>Phenotyping needs 3D structure.  Breeders want leaf count, leaf angle, height and biomass. Those live in geometry, but geometry is expensive to capture and cheap to photograph.</a:t>
+            </a:r>
+          </a:p>
+          <a:p>
+            <a:pPr algn="l">
+              <a:spcAft>
+                <a:spcPts val="700"/>
+              </a:spcAft>
+            </a:pPr>
+            <a:r>
+              <a:rPr sz="1350" b="0">
+                <a:solidFill>
+                  <a:srgbClr val="3D4C55"/>
+                </a:solidFill>
+                <a:latin typeface="Calibri"/>
+              </a:rPr>
+              <a:t>One encoder, four views of the same plant.  RGB, depth, a point cloud and the procedural parameters the plant was grown from are four descriptions of one object. A masked autoencoder over all four has to reconcile them in a single latent.</a:t>
+            </a:r>
+          </a:p>
+          <a:p>
+            <a:pPr algn="l">
+              <a:spcAft>
+                <a:spcPts val="700"/>
+              </a:spcAft>
+            </a:pPr>
+            <a:r>
+              <a:rPr sz="1350" b="0">
+                <a:solidFill>
+                  <a:srgbClr val="3D4C55"/>
+                </a:solidFill>
+                <a:latin typeface="Calibri"/>
+              </a:rPr>
+              <a:t>The novelty we defend.  The procedural growth parameters are not just a prediction target — they are a co-trained token stream, an input modality like the others. To our knowledge that is unoccupied ground for plants.</a:t>
+            </a:r>
+          </a:p>
+        </p:txBody>
+      </p:sp>
+      <p:sp>
+        <p:nvSpPr>
+          <p:cNvPr id="7" name="TextBox 6"/>
+          <p:cNvSpPr txBox="1"/>
+          <p:nvPr/>
+        </p:nvSpPr>
+        <p:spPr>
+          <a:xfrm>
+            <a:off x="6400800" y="1417320"/>
+            <a:ext cx="5303520" cy="365760"/>
+          </a:xfrm>
+          <a:prstGeom prst="rect">
+            <a:avLst/>
+          </a:prstGeom>
+          <a:noFill/>
+        </p:spPr>
+        <p:txBody>
+          <a:bodyPr wrap="square">
+            <a:normAutofit/>
+          </a:bodyPr>
+          <a:lstStyle/>
+          <a:p>
+            <a:pPr algn="l">
+              <a:spcAft>
+                <a:spcPts val="400"/>
+              </a:spcAft>
+            </a:pPr>
+            <a:r>
+              <a:rPr sz="1400" b="1">
+                <a:solidFill>
+                  <a:srgbClr val="10171C"/>
+                </a:solidFill>
+                <a:latin typeface="Calibri"/>
+              </a:rPr>
+              <a:t>Three questions this work has to answer</a:t>
+            </a:r>
+          </a:p>
+        </p:txBody>
+      </p:sp>
+      <p:sp>
+        <p:nvSpPr>
+          <p:cNvPr id="8" name="TextBox 7"/>
+          <p:cNvSpPr txBox="1"/>
+          <p:nvPr/>
+        </p:nvSpPr>
+        <p:spPr>
+          <a:xfrm>
+            <a:off x="6400800" y="1874519"/>
+            <a:ext cx="5303520" cy="4206240"/>
+          </a:xfrm>
+          <a:prstGeom prst="rect">
+            <a:avLst/>
+          </a:prstGeom>
+          <a:noFill/>
+        </p:spPr>
+        <p:txBody>
+          <a:bodyPr wrap="square">
+            <a:normAutofit/>
+          </a:bodyPr>
+          <a:lstStyle/>
+          <a:p>
+            <a:pPr algn="l">
+              <a:spcAft>
+                <a:spcPts val="1400"/>
+              </a:spcAft>
+            </a:pPr>
+            <a:r>
+              <a:rPr sz="1350" b="0">
+                <a:solidFill>
+                  <a:srgbClr val="3D4C55"/>
+                </a:solidFill>
+                <a:latin typeface="Calibri"/>
+              </a:rPr>
+              <a:t>1  Does each modality actually pay for itself, or is the fourth stream dead weight?   → E2</a:t>
+            </a:r>
+          </a:p>
+          <a:p>
+            <a:pPr algn="l">
+              <a:spcAft>
+                <a:spcPts val="1400"/>
+              </a:spcAft>
+            </a:pPr>
+            <a:r>
+              <a:rPr sz="1350" b="0">
+                <a:solidFill>
+                  <a:srgbClr val="3D4C55"/>
+                </a:solidFill>
+                <a:latin typeface="Calibri"/>
+              </a:rPr>
+              <a:t>2  Given one modality, can the model generate the others — and does distillation improve that?   → distillation</a:t>
+            </a:r>
+          </a:p>
+          <a:p>
+            <a:pPr algn="l">
+              <a:spcAft>
+                <a:spcPts val="1400"/>
+              </a:spcAft>
+            </a:pPr>
+            <a:r>
+              <a:rPr sz="1350" b="0">
+                <a:solidFill>
+                  <a:srgbClr val="3D4C55"/>
+                </a:solidFill>
+                <a:latin typeface="Calibri"/>
+              </a:rPr>
+              <a:t>3  Does performance come from more data, or more capacity?   → E3 / E4</a:t>
+            </a:r>
+          </a:p>
+        </p:txBody>
+      </p:sp>
+    </p:spTree>
+  </p:cSld>
+  <p:clrMapOvr>
+    <a:masterClrMapping/>
+  </p:clrMapOvr>
+</p:sld>
+</file>
+
+<file path=ppt/slides/slide3.xml><?xml version="1.0" encoding="utf-8"?>
+<p:sld xmlns:a="http://schemas.openxmlformats.org/drawingml/2006/main" xmlns:p="http://schemas.openxmlformats.org/presentationml/2006/main" xmlns:r="http://schemas.openxmlformats.org/officeDocument/2006/relationships">
+  <p:cSld>
+    <p:bg>
+      <p:bgPr>
+        <a:solidFill>
+          <a:srgbClr val="FFFFFF"/>
+        </a:solidFill>
+        <a:effectLst/>
+      </p:bgPr>
+    </p:bg>
+    <p:spTree>
+      <p:nvGrpSpPr>
+        <p:cNvPr id="1" name=""/>
+        <p:cNvGrpSpPr/>
+        <p:nvPr/>
+      </p:nvGrpSpPr>
+      <p:grpSpPr/>
+      <p:sp>
+        <p:nvSpPr>
+          <p:cNvPr id="2" name="TextBox 1"/>
+          <p:cNvSpPr txBox="1"/>
+          <p:nvPr/>
+        </p:nvSpPr>
+        <p:spPr>
+          <a:xfrm>
+            <a:off x="502920" y="274320"/>
+            <a:ext cx="640080" cy="365760"/>
+          </a:xfrm>
+          <a:prstGeom prst="rect">
+            <a:avLst/>
+          </a:prstGeom>
+          <a:noFill/>
+        </p:spPr>
+        <p:txBody>
+          <a:bodyPr wrap="square">
+            <a:normAutofit/>
+          </a:bodyPr>
+          <a:lstStyle/>
+          <a:p>
+            <a:pPr algn="l">
+              <a:spcAft>
+                <a:spcPts val="400"/>
+              </a:spcAft>
+            </a:pPr>
+            <a:r>
+              <a:rPr sz="1300" b="1">
+                <a:solidFill>
+                  <a:srgbClr val="0C6F7D"/>
+                </a:solidFill>
+                <a:latin typeface="Consolas"/>
+              </a:rPr>
+              <a:t>02</a:t>
+            </a:r>
+          </a:p>
+        </p:txBody>
+      </p:sp>
+      <p:sp>
+        <p:nvSpPr>
+          <p:cNvPr id="3" name="TextBox 2"/>
+          <p:cNvSpPr txBox="1"/>
+          <p:nvPr/>
+        </p:nvSpPr>
+        <p:spPr>
+          <a:xfrm>
+            <a:off x="1234440" y="164592"/>
+            <a:ext cx="7543800" cy="932688"/>
+          </a:xfrm>
+          <a:prstGeom prst="rect">
+            <a:avLst/>
+          </a:prstGeom>
+          <a:noFill/>
+        </p:spPr>
+        <p:txBody>
+          <a:bodyPr wrap="square">
+            <a:normAutofit/>
+          </a:bodyPr>
+          <a:lstStyle/>
+          <a:p>
+            <a:pPr algn="l">
+              <a:spcAft>
+                <a:spcPts val="400"/>
+              </a:spcAft>
+            </a:pPr>
+            <a:r>
+              <a:rPr sz="2200" b="1">
+                <a:solidFill>
+                  <a:srgbClr val="10171C"/>
+                </a:solidFill>
+                <a:latin typeface="Calibri"/>
+              </a:rPr>
+              <a:t>The data</a:t>
+            </a:r>
+          </a:p>
+        </p:txBody>
+      </p:sp>
+      <p:sp>
+        <p:nvSpPr>
+          <p:cNvPr id="4" name="TextBox 3"/>
+          <p:cNvSpPr txBox="1"/>
+          <p:nvPr/>
+        </p:nvSpPr>
+        <p:spPr>
+          <a:xfrm>
+            <a:off x="9052560" y="292608"/>
+            <a:ext cx="2697480" cy="530352"/>
+          </a:xfrm>
+          <a:prstGeom prst="rect">
+            <a:avLst/>
+          </a:prstGeom>
+          <a:noFill/>
+        </p:spPr>
+        <p:txBody>
+          <a:bodyPr wrap="square">
+            <a:normAutofit/>
+          </a:bodyPr>
+          <a:lstStyle/>
+          <a:p>
+            <a:pPr algn="r">
+              <a:spcAft>
+                <a:spcPts val="400"/>
+              </a:spcAft>
+            </a:pPr>
+            <a:r>
+              <a:rPr sz="1100" b="0">
+                <a:solidFill>
+                  <a:srgbClr val="6B7C86"/>
+                </a:solidFill>
+                <a:latin typeface="Consolas"/>
+              </a:rPr>
+              <a:t>Sorghum_15K</a:t>
+            </a:r>
+          </a:p>
+        </p:txBody>
+      </p:sp>
+      <p:sp>
+        <p:nvSpPr>
+          <p:cNvPr id="5" name="Rectangle 4"/>
+          <p:cNvSpPr/>
+          <p:nvPr/>
+        </p:nvSpPr>
+        <p:spPr>
+          <a:xfrm>
+            <a:off x="502920" y="1188720"/>
+            <a:ext cx="11155680" cy="27940"/>
+          </a:xfrm>
+          <a:prstGeom prst="rect">
+            <a:avLst/>
+          </a:prstGeom>
+          <a:solidFill>
+            <a:srgbClr val="10171C"/>
+          </a:solidFill>
+          <a:ln>
+            <a:noFill/>
+          </a:ln>
+          <a:effectLst/>
+        </p:spPr>
+        <p:style>
+          <a:lnRef idx="1">
+            <a:schemeClr val="accent1"/>
+          </a:lnRef>
+          <a:fillRef idx="3">
+            <a:schemeClr val="accent1"/>
+          </a:fillRef>
+          <a:effectRef idx="2">
+            <a:schemeClr val="accent1"/>
+          </a:effectRef>
+          <a:fontRef idx="minor">
+            <a:schemeClr val="lt1"/>
+          </a:fontRef>
+        </p:style>
+        <p:txBody>
+          <a:bodyPr rtlCol="0" anchor="ctr"/>
+          <a:lstStyle/>
+          <a:p>
+            <a:pPr algn="ctr"/>
+          </a:p>
+        </p:txBody>
+      </p:sp>
+      <p:sp>
+        <p:nvSpPr>
+          <p:cNvPr id="6" name="TextBox 5"/>
+          <p:cNvSpPr txBox="1"/>
+          <p:nvPr/>
+        </p:nvSpPr>
+        <p:spPr>
+          <a:xfrm>
+            <a:off x="502920" y="1417320"/>
+            <a:ext cx="5577840" cy="4754880"/>
+          </a:xfrm>
+          <a:prstGeom prst="rect">
+            <a:avLst/>
+          </a:prstGeom>
+          <a:noFill/>
+        </p:spPr>
+        <p:txBody>
+          <a:bodyPr wrap="square">
+            <a:normAutofit/>
+          </a:bodyPr>
+          <a:lstStyle/>
+          <a:p>
+            <a:pPr algn="l">
+              <a:spcAft>
+                <a:spcPts val="700"/>
+              </a:spcAft>
+            </a:pPr>
+            <a:r>
+              <a:rPr sz="1300" b="0">
+                <a:solidFill>
+                  <a:srgbClr val="3D4C55"/>
+                </a:solidFill>
+                <a:latin typeface="Calibri"/>
+              </a:rPr>
+              <a:t>15,000 procedurally generated plants,  each rendered from 10 camera views — 150,000 samples, 774 GB on disk.</a:t>
+            </a:r>
+          </a:p>
+          <a:p>
+            <a:pPr algn="l">
+              <a:spcAft>
+                <a:spcPts val="700"/>
+              </a:spcAft>
+            </a:pPr>
+            <a:r>
+              <a:rPr sz="1300" b="0">
+                <a:solidFill>
+                  <a:srgbClr val="3D4C55"/>
+                </a:solidFill>
+                <a:latin typeface="Calibri"/>
+              </a:rPr>
+              <a:t>Four aligned modalities per view:  an RGB render, a depth map, a camera-frame point cloud, and the generator parameters (stem, and up to 24 leaves × 7 fields each).</a:t>
+            </a:r>
+          </a:p>
+          <a:p>
+            <a:pPr algn="l">
+              <a:spcAft>
+                <a:spcPts val="700"/>
+              </a:spcAft>
+            </a:pPr>
+            <a:r>
+              <a:rPr sz="1300" b="0">
+                <a:solidFill>
+                  <a:srgbClr val="3D4C55"/>
+                </a:solidFill>
+                <a:latin typeface="Calibri"/>
+              </a:rPr>
+              <a:t>Split 70/15/15 BY PLANT, not by view.  An earlier 10k split was made per camera view, so every validation sample was a training plant from a new angle. It scored 0.0003 and meant nothing. Splitting by plant is the difference between 0.0003 and an honest 0.05.</a:t>
+            </a:r>
+          </a:p>
+          <a:p>
+            <a:pPr algn="l">
+              <a:spcAft>
+                <a:spcPts val="700"/>
+              </a:spcAft>
+            </a:pPr>
+            <a:r>
+              <a:rPr sz="1300" b="0">
+                <a:solidFill>
+                  <a:srgbClr val="3D4C55"/>
+                </a:solidFill>
+                <a:latin typeface="Calibri"/>
+              </a:rPr>
+              <a:t>The ten views are an elevation ladder,  not ten random cameras: sin(elev) = −0.9 + 0.2 × view index exactly, azimuth randomised. That makes camera angle a free controlled variable.</a:t>
+            </a:r>
+          </a:p>
+        </p:txBody>
+      </p:sp>
+      <p:sp>
+        <p:nvSpPr>
+          <p:cNvPr id="7" name="TextBox 6"/>
+          <p:cNvSpPr txBox="1"/>
+          <p:nvPr/>
+        </p:nvSpPr>
+        <p:spPr>
+          <a:xfrm>
+            <a:off x="6492240" y="1417320"/>
+            <a:ext cx="5212080" cy="365760"/>
+          </a:xfrm>
+          <a:prstGeom prst="rect">
+            <a:avLst/>
+          </a:prstGeom>
+          <a:noFill/>
+        </p:spPr>
+        <p:txBody>
+          <a:bodyPr wrap="square">
+            <a:normAutofit/>
+          </a:bodyPr>
+          <a:lstStyle/>
+          <a:p>
+            <a:pPr algn="l">
+              <a:spcAft>
+                <a:spcPts val="400"/>
+              </a:spcAft>
+            </a:pPr>
+            <a:r>
+              <a:rPr sz="1400" b="1">
+                <a:solidFill>
+                  <a:srgbClr val="10171C"/>
+                </a:solidFill>
+                <a:latin typeface="Calibri"/>
+              </a:rPr>
+              <a:t>Split, by plant</a:t>
+            </a:r>
+          </a:p>
+        </p:txBody>
+      </p:sp>
+      <p:graphicFrame>
+        <p:nvGraphicFramePr>
+          <p:cNvPr id="8" name="Table 7"/>
+          <p:cNvGraphicFramePr>
+            <a:graphicFrameLocks noGrp="1"/>
+          </p:cNvGraphicFramePr>
+          <p:nvPr/>
+        </p:nvGraphicFramePr>
+        <p:xfrm>
+          <a:off x="6492240" y="1828800"/>
+          <a:ext cx="5120640" cy="1645920"/>
+        </p:xfrm>
+        <a:graphic>
+          <a:graphicData uri="http://schemas.openxmlformats.org/drawingml/2006/table">
+            <a:tbl>
+              <a:tblPr firstRow="1" bandRow="1">
+                <a:tableStyleId>{5C22544A-7EE6-4342-B048-85BDC9FD1C3A}</a:tableStyleId>
+              </a:tblPr>
+              <a:tblGrid>
+                <a:gridCol w="2011680"/>
+                <a:gridCol w="1554480"/>
+                <a:gridCol w="1554480"/>
+              </a:tblGrid>
+              <a:tr h="411480">
+                <a:tc>
+                  <a:txBody>
+                    <a:bodyPr/>
+                    <a:lstStyle/>
+                    <a:p>
+                      <a:r>
+                        <a:rPr sz="1200" b="1">
+                          <a:solidFill>
+                            <a:srgbClr val="10171C"/>
+                          </a:solidFill>
+                        </a:rPr>
+                        <a:t>split</a:t>
+                      </a:r>
+                    </a:p>
+                  </a:txBody>
+                  <a:tcPr/>
+                </a:tc>
+                <a:tc>
+                  <a:txBody>
+                    <a:bodyPr/>
+                    <a:lstStyle/>
+                    <a:p>
+                      <a:r>
+                        <a:rPr sz="1200" b="1">
+                          <a:solidFill>
+                            <a:srgbClr val="10171C"/>
+                          </a:solidFill>
+                        </a:rPr>
+                        <a:t>plants</a:t>
+                      </a:r>
+                    </a:p>
+                  </a:txBody>
+                  <a:tcPr/>
+                </a:tc>
+                <a:tc>
+                  <a:txBody>
+                    <a:bodyPr/>
+                    <a:lstStyle/>
+                    <a:p>
+                      <a:r>
+                        <a:rPr sz="1200" b="1">
+                          <a:solidFill>
+                            <a:srgbClr val="10171C"/>
+                          </a:solidFill>
+                        </a:rPr>
+                        <a:t>view-samples</a:t>
+                      </a:r>
+                    </a:p>
+                  </a:txBody>
+                  <a:tcPr/>
+                </a:tc>
+              </a:tr>
+              <a:tr h="411480">
+                <a:tc>
+                  <a:txBody>
+                    <a:bodyPr/>
+                    <a:lstStyle/>
+                    <a:p>
+                      <a:r>
+                        <a:rPr sz="1200" b="0">
+                          <a:solidFill>
+                            <a:srgbClr val="3D4C55"/>
+                          </a:solidFill>
+                        </a:rPr>
+                        <a:t>train</a:t>
+                      </a:r>
+                    </a:p>
+                  </a:txBody>
+                  <a:tcPr/>
+                </a:tc>
+                <a:tc>
+                  <a:txBody>
+                    <a:bodyPr/>
+                    <a:lstStyle/>
+                    <a:p>
+                      <a:r>
+                        <a:rPr sz="1200" b="0">
+                          <a:solidFill>
+                            <a:srgbClr val="3D4C55"/>
+                          </a:solidFill>
+                        </a:rPr>
+                        <a:t>10,500</a:t>
+                      </a:r>
+                    </a:p>
+                  </a:txBody>
+                  <a:tcPr/>
+                </a:tc>
+                <a:tc>
+                  <a:txBody>
+                    <a:bodyPr/>
+                    <a:lstStyle/>
+                    <a:p>
+                      <a:r>
+                        <a:rPr sz="1200" b="0">
+                          <a:solidFill>
+                            <a:srgbClr val="3D4C55"/>
+                          </a:solidFill>
+                        </a:rPr>
+                        <a:t>105,000</a:t>
+                      </a:r>
+                    </a:p>
+                  </a:txBody>
+                  <a:tcPr/>
+                </a:tc>
+              </a:tr>
+              <a:tr h="411480">
+                <a:tc>
+                  <a:txBody>
+                    <a:bodyPr/>
+                    <a:lstStyle/>
+                    <a:p>
+                      <a:r>
+                        <a:rPr sz="1200" b="0">
+                          <a:solidFill>
+                            <a:srgbClr val="3D4C55"/>
+                          </a:solidFill>
+                        </a:rPr>
+                        <a:t>val</a:t>
+                      </a:r>
+                    </a:p>
+                  </a:txBody>
+                  <a:tcPr/>
+                </a:tc>
+                <a:tc>
+                  <a:txBody>
+                    <a:bodyPr/>
+                    <a:lstStyle/>
+                    <a:p>
+                      <a:r>
+                        <a:rPr sz="1200" b="0">
+                          <a:solidFill>
+                            <a:srgbClr val="3D4C55"/>
+                          </a:solidFill>
+                        </a:rPr>
+                        <a:t>2,250</a:t>
+                      </a:r>
+                    </a:p>
+                  </a:txBody>
+                  <a:tcPr/>
+                </a:tc>
+                <a:tc>
+                  <a:txBody>
+                    <a:bodyPr/>
+                    <a:lstStyle/>
+                    <a:p>
+                      <a:r>
+                        <a:rPr sz="1200" b="0">
+                          <a:solidFill>
+                            <a:srgbClr val="3D4C55"/>
+                          </a:solidFill>
+                        </a:rPr>
+                        <a:t>22,500</a:t>
+                      </a:r>
+                    </a:p>
+                  </a:txBody>
+                  <a:tcPr/>
+                </a:tc>
+              </a:tr>
+              <a:tr h="411480">
+                <a:tc>
+                  <a:txBody>
+                    <a:bodyPr/>
+                    <a:lstStyle/>
+                    <a:p>
+                      <a:r>
+                        <a:rPr sz="1200" b="0">
+                          <a:solidFill>
+                            <a:srgbClr val="3D4C55"/>
+                          </a:solidFill>
+                        </a:rPr>
+                        <a:t>test</a:t>
+                      </a:r>
+                    </a:p>
+                  </a:txBody>
+                  <a:tcPr/>
+                </a:tc>
+                <a:tc>
+                  <a:txBody>
+                    <a:bodyPr/>
+                    <a:lstStyle/>
+                    <a:p>
+                      <a:r>
+                        <a:rPr sz="1200" b="0">
+                          <a:solidFill>
+                            <a:srgbClr val="3D4C55"/>
+                          </a:solidFill>
+                        </a:rPr>
+                        <a:t>2,250</a:t>
+                      </a:r>
+                    </a:p>
+                  </a:txBody>
+                  <a:tcPr/>
+                </a:tc>
+                <a:tc>
+                  <a:txBody>
+                    <a:bodyPr/>
+                    <a:lstStyle/>
+                    <a:p>
+                      <a:r>
+                        <a:rPr sz="1200" b="0">
+                          <a:solidFill>
+                            <a:srgbClr val="3D4C55"/>
+                          </a:solidFill>
+                        </a:rPr>
+                        <a:t>22,500</a:t>
+                      </a:r>
+                    </a:p>
+                  </a:txBody>
+                  <a:tcPr/>
+                </a:tc>
+              </a:tr>
+            </a:tbl>
+          </a:graphicData>
+        </a:graphic>
+      </p:graphicFrame>
+      <p:sp>
+        <p:nvSpPr>
+          <p:cNvPr id="9" name="TextBox 8"/>
+          <p:cNvSpPr txBox="1"/>
+          <p:nvPr/>
+        </p:nvSpPr>
+        <p:spPr>
+          <a:xfrm>
+            <a:off x="6492240" y="3703320"/>
+            <a:ext cx="5212080" cy="2194560"/>
+          </a:xfrm>
+          <a:prstGeom prst="rect">
+            <a:avLst/>
+          </a:prstGeom>
+          <a:noFill/>
+        </p:spPr>
+        <p:txBody>
+          <a:bodyPr wrap="square">
+            <a:normAutofit/>
+          </a:bodyPr>
+          <a:lstStyle/>
+          <a:p>
+            <a:pPr algn="l">
+              <a:spcAft>
+                <a:spcPts val="400"/>
+              </a:spcAft>
+            </a:pPr>
+            <a:r>
+              <a:rPr sz="1350" b="1">
+                <a:solidFill>
+                  <a:srgbClr val="10171C"/>
+                </a:solidFill>
+                <a:latin typeface="Calibri"/>
+              </a:rPr>
+              <a:t>Only four files per sample are ever read</a:t>
+            </a:r>
+          </a:p>
+          <a:p>
+            <a:pPr algn="l">
+              <a:spcAft>
+                <a:spcPts val="400"/>
+              </a:spcAft>
+            </a:pPr>
+            <a:r>
+              <a:rPr sz="1250" b="0">
+                <a:solidFill>
+                  <a:srgbClr val="3D4C55"/>
+                </a:solidFill>
+                <a:latin typeface="Calibri"/>
+              </a:rPr>
+              <a:t>rgb.png, depth.png, *_nc_cam.ply, *_spline.yml — about 1.8 MB of the 5 MB per sample. The source .obj and the world-frame .ply are duplicated into all ten view folders and never opened in training, which is 64% of the bytes on disk.</a:t>
+            </a:r>
+          </a:p>
+        </p:txBody>
+      </p:sp>
+    </p:spTree>
+  </p:cSld>
+  <p:clrMapOvr>
+    <a:masterClrMapping/>
+  </p:clrMapOvr>
+</p:sld>
+</file>
+
+<file path=ppt/slides/slide4.xml><?xml version="1.0" encoding="utf-8"?>
+<p:sld xmlns:a="http://schemas.openxmlformats.org/drawingml/2006/main" xmlns:p="http://schemas.openxmlformats.org/presentationml/2006/main" xmlns:r="http://schemas.openxmlformats.org/officeDocument/2006/relationships">
+  <p:cSld>
+    <p:bg>
+      <p:bgPr>
+        <a:solidFill>
+          <a:srgbClr val="FFFFFF"/>
+        </a:solidFill>
+        <a:effectLst/>
+      </p:bgPr>
+    </p:bg>
+    <p:spTree>
+      <p:nvGrpSpPr>
+        <p:cNvPr id="1" name=""/>
+        <p:cNvGrpSpPr/>
+        <p:nvPr/>
+      </p:nvGrpSpPr>
+      <p:grpSpPr/>
+      <p:sp>
+        <p:nvSpPr>
+          <p:cNvPr id="2" name="TextBox 1"/>
+          <p:cNvSpPr txBox="1"/>
+          <p:nvPr/>
+        </p:nvSpPr>
+        <p:spPr>
+          <a:xfrm>
+            <a:off x="502920" y="274320"/>
+            <a:ext cx="640080" cy="365760"/>
+          </a:xfrm>
+          <a:prstGeom prst="rect">
+            <a:avLst/>
+          </a:prstGeom>
+          <a:noFill/>
+        </p:spPr>
+        <p:txBody>
+          <a:bodyPr wrap="square">
+            <a:normAutofit/>
+          </a:bodyPr>
+          <a:lstStyle/>
+          <a:p>
+            <a:pPr algn="l">
+              <a:spcAft>
+                <a:spcPts val="400"/>
+              </a:spcAft>
+            </a:pPr>
+            <a:r>
+              <a:rPr sz="1300" b="1">
+                <a:solidFill>
+                  <a:srgbClr val="0C6F7D"/>
+                </a:solidFill>
+                <a:latin typeface="Consolas"/>
+              </a:rPr>
+              <a:t>03</a:t>
+            </a:r>
+          </a:p>
+        </p:txBody>
+      </p:sp>
+      <p:sp>
+        <p:nvSpPr>
+          <p:cNvPr id="3" name="TextBox 2"/>
+          <p:cNvSpPr txBox="1"/>
+          <p:nvPr/>
+        </p:nvSpPr>
+        <p:spPr>
+          <a:xfrm>
+            <a:off x="1234440" y="164592"/>
+            <a:ext cx="7543800" cy="932688"/>
+          </a:xfrm>
+          <a:prstGeom prst="rect">
+            <a:avLst/>
+          </a:prstGeom>
+          <a:noFill/>
+        </p:spPr>
+        <p:txBody>
+          <a:bodyPr wrap="square">
+            <a:normAutofit/>
+          </a:bodyPr>
+          <a:lstStyle/>
+          <a:p>
+            <a:pPr algn="l">
+              <a:spcAft>
+                <a:spcPts val="400"/>
+              </a:spcAft>
+            </a:pPr>
+            <a:r>
+              <a:rPr sz="2200" b="1">
+                <a:solidFill>
+                  <a:srgbClr val="10171C"/>
+                </a:solidFill>
+                <a:latin typeface="Calibri"/>
+              </a:rPr>
+              <a:t>Method — one encoder, four token streams</a:t>
+            </a:r>
+          </a:p>
+        </p:txBody>
+      </p:sp>
+      <p:sp>
+        <p:nvSpPr>
+          <p:cNvPr id="4" name="TextBox 3"/>
+          <p:cNvSpPr txBox="1"/>
+          <p:nvPr/>
+        </p:nvSpPr>
+        <p:spPr>
+          <a:xfrm>
+            <a:off x="9052560" y="292608"/>
+            <a:ext cx="2697480" cy="530352"/>
+          </a:xfrm>
+          <a:prstGeom prst="rect">
+            <a:avLst/>
+          </a:prstGeom>
+          <a:noFill/>
+        </p:spPr>
+        <p:txBody>
+          <a:bodyPr wrap="square">
+            <a:normAutofit/>
+          </a:bodyPr>
+          <a:lstStyle/>
+          <a:p>
+            <a:pPr algn="r">
+              <a:spcAft>
+                <a:spcPts val="400"/>
+              </a:spcAft>
+            </a:pPr>
+            <a:r>
+              <a:rPr sz="1100" b="0">
+                <a:solidFill>
+                  <a:srgbClr val="6B7C86"/>
+                </a:solidFill>
+                <a:latin typeface="Consolas"/>
+              </a:rPr>
+              <a:t>ViT-base, depth 12, dim 768</a:t>
+            </a:r>
+          </a:p>
+        </p:txBody>
+      </p:sp>
+      <p:sp>
+        <p:nvSpPr>
+          <p:cNvPr id="5" name="Rectangle 4"/>
+          <p:cNvSpPr/>
+          <p:nvPr/>
+        </p:nvSpPr>
+        <p:spPr>
+          <a:xfrm>
+            <a:off x="502920" y="1188720"/>
+            <a:ext cx="11155680" cy="27940"/>
+          </a:xfrm>
+          <a:prstGeom prst="rect">
+            <a:avLst/>
+          </a:prstGeom>
+          <a:solidFill>
+            <a:srgbClr val="10171C"/>
+          </a:solidFill>
+          <a:ln>
+            <a:noFill/>
+          </a:ln>
+          <a:effectLst/>
+        </p:spPr>
+        <p:style>
+          <a:lnRef idx="1">
+            <a:schemeClr val="accent1"/>
+          </a:lnRef>
+          <a:fillRef idx="3">
+            <a:schemeClr val="accent1"/>
+          </a:fillRef>
+          <a:effectRef idx="2">
+            <a:schemeClr val="accent1"/>
+          </a:effectRef>
+          <a:fontRef idx="minor">
+            <a:schemeClr val="lt1"/>
+          </a:fontRef>
+        </p:style>
+        <p:txBody>
+          <a:bodyPr rtlCol="0" anchor="ctr"/>
+          <a:lstStyle/>
+          <a:p>
+            <a:pPr algn="ctr"/>
+          </a:p>
+        </p:txBody>
+      </p:sp>
+      <p:pic>
+        <p:nvPicPr>
+          <p:cNvPr id="6" name="Picture 5" descr="arch_diagram.png"/>
+          <p:cNvPicPr>
+            <a:picLocks noChangeAspect="1"/>
+          </p:cNvPicPr>
+          <p:nvPr/>
+        </p:nvPicPr>
+        <p:blipFill>
+          <a:blip r:embed="rId2"/>
+          <a:stretch>
+            <a:fillRect/>
+          </a:stretch>
+        </p:blipFill>
+        <p:spPr>
+          <a:xfrm>
+            <a:off x="1624584" y="1371600"/>
+            <a:ext cx="8912352" cy="3931920"/>
+          </a:xfrm>
+          <a:prstGeom prst="rect">
+            <a:avLst/>
+          </a:prstGeom>
+        </p:spPr>
+      </p:pic>
+      <p:sp>
+        <p:nvSpPr>
+          <p:cNvPr id="7" name="TextBox 6"/>
+          <p:cNvSpPr txBox="1"/>
+          <p:nvPr/>
+        </p:nvSpPr>
+        <p:spPr>
+          <a:xfrm>
+            <a:off x="502920" y="5440680"/>
+            <a:ext cx="11155680" cy="1097280"/>
+          </a:xfrm>
+          <a:prstGeom prst="rect">
+            <a:avLst/>
+          </a:prstGeom>
+          <a:noFill/>
+        </p:spPr>
+        <p:txBody>
+          <a:bodyPr wrap="square">
+            <a:normAutofit/>
+          </a:bodyPr>
+          <a:lstStyle/>
+          <a:p>
+            <a:pPr algn="l">
+              <a:spcAft>
+                <a:spcPts val="400"/>
+              </a:spcAft>
+            </a:pPr>
+            <a:r>
+              <a:rPr sz="1250" b="0">
+                <a:solidFill>
+                  <a:srgbClr val="3D4C55"/>
+                </a:solidFill>
+                <a:latin typeface="Calibri"/>
+              </a:rPr>
+              <a:t>Each modality gets its own embedder and its own decoder head; the encoder sees the union of visible tokens plus a shared CLS. RGB and depth patchify to 196 tokens, the point cloud is grouped into 196 FPS centres with kNN neighbourhoods, and the parameters become 25 tokens (1 plant + 24 leaves).</a:t>
+            </a:r>
+          </a:p>
+        </p:txBody>
+      </p:sp>
+    </p:spTree>
+  </p:cSld>
+  <p:clrMapOvr>
+    <a:masterClrMapping/>
+  </p:clrMapOvr>
+</p:sld>
+</file>
+
+<file path=ppt/slides/slide5.xml><?xml version="1.0" encoding="utf-8"?>
+<p:sld xmlns:a="http://schemas.openxmlformats.org/drawingml/2006/main" xmlns:p="http://schemas.openxmlformats.org/presentationml/2006/main" xmlns:r="http://schemas.openxmlformats.org/officeDocument/2006/relationships">
+  <p:cSld>
+    <p:bg>
+      <p:bgPr>
+        <a:solidFill>
+          <a:srgbClr val="FFFFFF"/>
+        </a:solidFill>
+        <a:effectLst/>
+      </p:bgPr>
+    </p:bg>
+    <p:spTree>
+      <p:nvGrpSpPr>
+        <p:cNvPr id="1" name=""/>
+        <p:cNvGrpSpPr/>
+        <p:nvPr/>
+      </p:nvGrpSpPr>
+      <p:grpSpPr/>
+      <p:sp>
+        <p:nvSpPr>
+          <p:cNvPr id="2" name="TextBox 1"/>
+          <p:cNvSpPr txBox="1"/>
+          <p:nvPr/>
+        </p:nvSpPr>
+        <p:spPr>
+          <a:xfrm>
+            <a:off x="502920" y="274320"/>
+            <a:ext cx="640080" cy="365760"/>
+          </a:xfrm>
+          <a:prstGeom prst="rect">
+            <a:avLst/>
+          </a:prstGeom>
+          <a:noFill/>
+        </p:spPr>
+        <p:txBody>
+          <a:bodyPr wrap="square">
+            <a:normAutofit/>
+          </a:bodyPr>
+          <a:lstStyle/>
+          <a:p>
+            <a:pPr algn="l">
+              <a:spcAft>
+                <a:spcPts val="400"/>
+              </a:spcAft>
+            </a:pPr>
+            <a:r>
+              <a:rPr sz="1300" b="1">
+                <a:solidFill>
+                  <a:srgbClr val="0C6F7D"/>
+                </a:solidFill>
+                <a:latin typeface="Consolas"/>
+              </a:rPr>
+              <a:t>04</a:t>
+            </a:r>
+          </a:p>
+        </p:txBody>
+      </p:sp>
+      <p:sp>
+        <p:nvSpPr>
+          <p:cNvPr id="3" name="TextBox 2"/>
+          <p:cNvSpPr txBox="1"/>
+          <p:nvPr/>
+        </p:nvSpPr>
+        <p:spPr>
+          <a:xfrm>
+            <a:off x="1234440" y="164592"/>
+            <a:ext cx="7543800" cy="932688"/>
+          </a:xfrm>
+          <a:prstGeom prst="rect">
+            <a:avLst/>
+          </a:prstGeom>
+          <a:noFill/>
+        </p:spPr>
+        <p:txBody>
+          <a:bodyPr wrap="square">
+            <a:normAutofit/>
+          </a:bodyPr>
+          <a:lstStyle/>
+          <a:p>
+            <a:pPr algn="l">
+              <a:spcAft>
+                <a:spcPts val="400"/>
+              </a:spcAft>
+            </a:pPr>
+            <a:r>
+              <a:rPr sz="2200" b="1">
+                <a:solidFill>
+                  <a:srgbClr val="10171C"/>
+                </a:solidFill>
+                <a:latin typeface="Calibri"/>
+              </a:rPr>
+              <a:t>Method — masking and the training protocol</a:t>
+            </a:r>
+          </a:p>
+        </p:txBody>
+      </p:sp>
+      <p:sp>
+        <p:nvSpPr>
+          <p:cNvPr id="4" name="TextBox 3"/>
+          <p:cNvSpPr txBox="1"/>
+          <p:nvPr/>
+        </p:nvSpPr>
+        <p:spPr>
+          <a:xfrm>
+            <a:off x="9052560" y="292608"/>
+            <a:ext cx="2697480" cy="530352"/>
+          </a:xfrm>
+          <a:prstGeom prst="rect">
+            <a:avLst/>
+          </a:prstGeom>
+          <a:noFill/>
+        </p:spPr>
+        <p:txBody>
+          <a:bodyPr wrap="square">
+            <a:normAutofit/>
+          </a:bodyPr>
+          <a:lstStyle/>
+          <a:p>
+            <a:pPr algn="r">
+              <a:spcAft>
+                <a:spcPts val="400"/>
+              </a:spcAft>
+            </a:pPr>
+            <a:r>
+              <a:rPr sz="1100" b="0">
+                <a:solidFill>
+                  <a:srgbClr val="6B7C86"/>
+                </a:solidFill>
+                <a:latin typeface="Consolas"/>
+              </a:rPr>
+              <a:t>what is held fixed</a:t>
+            </a:r>
+          </a:p>
+        </p:txBody>
+      </p:sp>
+      <p:sp>
+        <p:nvSpPr>
+          <p:cNvPr id="5" name="Rectangle 4"/>
+          <p:cNvSpPr/>
+          <p:nvPr/>
+        </p:nvSpPr>
+        <p:spPr>
+          <a:xfrm>
+            <a:off x="502920" y="1188720"/>
+            <a:ext cx="11155680" cy="27940"/>
+          </a:xfrm>
+          <a:prstGeom prst="rect">
+            <a:avLst/>
+          </a:prstGeom>
+          <a:solidFill>
+            <a:srgbClr val="10171C"/>
+          </a:solidFill>
+          <a:ln>
+            <a:noFill/>
+          </a:ln>
+          <a:effectLst/>
+        </p:spPr>
+        <p:style>
+          <a:lnRef idx="1">
+            <a:schemeClr val="accent1"/>
+          </a:lnRef>
+          <a:fillRef idx="3">
+            <a:schemeClr val="accent1"/>
+          </a:fillRef>
+          <a:effectRef idx="2">
+            <a:schemeClr val="accent1"/>
+          </a:effectRef>
+          <a:fontRef idx="minor">
+            <a:schemeClr val="lt1"/>
+          </a:fontRef>
+        </p:style>
+        <p:txBody>
+          <a:bodyPr rtlCol="0" anchor="ctr"/>
+          <a:lstStyle/>
+          <a:p>
+            <a:pPr algn="ctr"/>
+          </a:p>
+        </p:txBody>
+      </p:sp>
+      <p:sp>
+        <p:nvSpPr>
+          <p:cNvPr id="6" name="TextBox 5"/>
+          <p:cNvSpPr txBox="1"/>
+          <p:nvPr/>
+        </p:nvSpPr>
+        <p:spPr>
+          <a:xfrm>
+            <a:off x="502920" y="1417320"/>
+            <a:ext cx="5577840" cy="4846320"/>
+          </a:xfrm>
+          <a:prstGeom prst="rect">
+            <a:avLst/>
+          </a:prstGeom>
+          <a:noFill/>
+        </p:spPr>
+        <p:txBody>
+          <a:bodyPr wrap="square">
+            <a:normAutofit/>
+          </a:bodyPr>
+          <a:lstStyle/>
+          <a:p>
+            <a:pPr algn="l">
+              <a:spcAft>
+                <a:spcPts val="700"/>
+              </a:spcAft>
+            </a:pPr>
+            <a:r>
+              <a:rPr sz="1300" b="0">
+                <a:solidFill>
+                  <a:srgbClr val="3D4C55"/>
+                </a:solidFill>
+                <a:latin typeface="Calibri"/>
+              </a:rPr>
+              <a:t>Masking is allocated, not uniform.  80% of tokens are masked overall, but the split across the four modalities is drawn from a Dirichlet once per batch, with a floor of 25% masking per modality. The per-modality count is identical batch-wide, which avoids batch elements with zero visible tokens corrupting the encoder norms.</a:t>
+            </a:r>
+          </a:p>
+          <a:p>
+            <a:pPr algn="l">
+              <a:spcAft>
+                <a:spcPts val="700"/>
+              </a:spcAft>
+            </a:pPr>
+            <a:r>
+              <a:rPr sz="1300" b="0">
+                <a:solidFill>
+                  <a:srgbClr val="3D4C55"/>
+                </a:solidFill>
+                <a:latin typeface="Calibri"/>
+              </a:rPr>
+              <a:t>One view per plant per epoch.  Views act as augmentation rather than as extra data, so an epoch is 10,500 items and not 105,000. The draw is a pure function of (seed, epoch, plant), so it is identical on every rank and reproducible from the seed alone.</a:t>
+            </a:r>
+          </a:p>
+        </p:txBody>
+      </p:sp>
+      <p:sp>
+        <p:nvSpPr>
+          <p:cNvPr id="7" name="TextBox 6"/>
+          <p:cNvSpPr txBox="1"/>
+          <p:nvPr/>
+        </p:nvSpPr>
+        <p:spPr>
+          <a:xfrm>
+            <a:off x="6492240" y="1417320"/>
+            <a:ext cx="5212080" cy="365760"/>
+          </a:xfrm>
+          <a:prstGeom prst="rect">
+            <a:avLst/>
+          </a:prstGeom>
+          <a:noFill/>
+        </p:spPr>
+        <p:txBody>
+          <a:bodyPr wrap="square">
+            <a:normAutofit/>
+          </a:bodyPr>
+          <a:lstStyle/>
+          <a:p>
+            <a:pPr algn="l">
+              <a:spcAft>
+                <a:spcPts val="400"/>
+              </a:spcAft>
+            </a:pPr>
+            <a:r>
+              <a:rPr sz="1400" b="1">
+                <a:solidFill>
+                  <a:srgbClr val="10171C"/>
+                </a:solidFill>
+                <a:latin typeface="Calibri"/>
+              </a:rPr>
+              <a:t>Ablations are sized in optimizer steps</a:t>
+            </a:r>
+          </a:p>
+        </p:txBody>
+      </p:sp>
+      <p:sp>
+        <p:nvSpPr>
+          <p:cNvPr id="8" name="TextBox 7"/>
+          <p:cNvSpPr txBox="1"/>
+          <p:nvPr/>
+        </p:nvSpPr>
+        <p:spPr>
+          <a:xfrm>
+            <a:off x="6492240" y="1847088"/>
+            <a:ext cx="5212080" cy="4114800"/>
+          </a:xfrm>
+          <a:prstGeom prst="rect">
+            <a:avLst/>
+          </a:prstGeom>
+          <a:noFill/>
+        </p:spPr>
+        <p:txBody>
+          <a:bodyPr wrap="square">
+            <a:normAutofit/>
+          </a:bodyPr>
+          <a:lstStyle/>
+          <a:p>
+            <a:pPr algn="l">
+              <a:spcAft>
+                <a:spcPts val="400"/>
+              </a:spcAft>
+            </a:pPr>
+            <a:r>
+              <a:rPr sz="1250" b="0">
+                <a:solidFill>
+                  <a:srgbClr val="3D4C55"/>
+                </a:solidFill>
+                <a:latin typeface="Calibri"/>
+              </a:rPr>
+              <a:t>An epoch under view sampling is one view per plant, so its size IS the plant count. Equal epochs would hand the 10k-plant arm ten times the gradient updates of the 1k-plant arm, and the scaling curve would be measuring data and compute together.</a:t>
+            </a:r>
+          </a:p>
+          <a:p>
+            <a:pPr algn="l">
+              <a:spcAft>
+                <a:spcPts val="400"/>
+              </a:spcAft>
+            </a:pPr>
+            <a:r>
+              <a:rPr sz="800" b="0">
+                <a:solidFill>
+                  <a:srgbClr val="3D4C55"/>
+                </a:solidFill>
+                <a:latin typeface="Calibri"/>
+              </a:rPr>
+              <a:t/>
+            </a:r>
+          </a:p>
+          <a:p>
+            <a:pPr algn="l">
+              <a:spcAft>
+                <a:spcPts val="400"/>
+              </a:spcAft>
+            </a:pPr>
+            <a:r>
+              <a:rPr sz="1300" b="1">
+                <a:solidFill>
+                  <a:srgbClr val="0C6F7D"/>
+                </a:solidFill>
+                <a:latin typeface="Calibri"/>
+              </a:rPr>
+              <a:t>Every ablation arm runs 197,400 optimizer steps at global batch 32.</a:t>
+            </a:r>
+          </a:p>
+          <a:p>
+            <a:pPr algn="l">
+              <a:spcAft>
+                <a:spcPts val="400"/>
+              </a:spcAft>
+            </a:pPr>
+            <a:r>
+              <a:rPr sz="800" b="0">
+                <a:solidFill>
+                  <a:srgbClr val="3D4C55"/>
+                </a:solidFill>
+                <a:latin typeface="Calibri"/>
+              </a:rPr>
+              <a:t/>
+            </a:r>
+          </a:p>
+          <a:p>
+            <a:pPr algn="l">
+              <a:spcAft>
+                <a:spcPts val="400"/>
+              </a:spcAft>
+            </a:pPr>
+            <a:r>
+              <a:rPr sz="1250" b="0">
+                <a:solidFill>
+                  <a:srgbClr val="3D4C55"/>
+                </a:solidFill>
+                <a:latin typeface="Calibri"/>
+              </a:rPr>
+              <a:t>So the E3 configs carry very different epoch counts — 6,169 / 2,100 / 631 — on purpose. Normalising them would unfix the one thing the experiment controls.</a:t>
+            </a:r>
+          </a:p>
+          <a:p>
+            <a:pPr algn="l">
+              <a:spcAft>
+                <a:spcPts val="400"/>
+              </a:spcAft>
+            </a:pPr>
+            <a:r>
+              <a:rPr sz="800" b="0">
+                <a:solidFill>
+                  <a:srgbClr val="3D4C55"/>
+                </a:solidFill>
+                <a:latin typeface="Calibri"/>
+              </a:rPr>
+              <a:t/>
+            </a:r>
+          </a:p>
+          <a:p>
+            <a:pPr algn="l">
+              <a:spcAft>
+                <a:spcPts val="400"/>
+              </a:spcAft>
+            </a:pPr>
+            <a:r>
+              <a:rPr sz="1250" b="0">
+                <a:solidFill>
+                  <a:srgbClr val="6B7C86"/>
+                </a:solidFill>
+                <a:latin typeface="Calibri"/>
+              </a:rPr>
+              <a:t>Global batch is per-GPU batch × GPU count, so each launcher sets its own per-GPU value: 16×2 on the 2-GPU nodes, 8×4 on the 4-GPU nodes.</a:t>
+            </a:r>
+          </a:p>
+        </p:txBody>
+      </p:sp>
+    </p:spTree>
+  </p:cSld>
+  <p:clrMapOvr>
+    <a:masterClrMapping/>
+  </p:clrMapOvr>
+</p:sld>
+</file>
+
+<file path=ppt/slides/slide6.xml><?xml version="1.0" encoding="utf-8"?>
+<p:sld xmlns:a="http://schemas.openxmlformats.org/drawingml/2006/main" xmlns:p="http://schemas.openxmlformats.org/presentationml/2006/main" xmlns:r="http://schemas.openxmlformats.org/officeDocument/2006/relationships">
+  <p:cSld>
+    <p:bg>
+      <p:bgPr>
+        <a:solidFill>
+          <a:srgbClr val="FFFFFF"/>
+        </a:solidFill>
+        <a:effectLst/>
+      </p:bgPr>
+    </p:bg>
+    <p:spTree>
+      <p:nvGrpSpPr>
+        <p:cNvPr id="1" name=""/>
+        <p:cNvGrpSpPr/>
+        <p:nvPr/>
+      </p:nvGrpSpPr>
+      <p:grpSpPr/>
+      <p:sp>
+        <p:nvSpPr>
+          <p:cNvPr id="2" name="TextBox 1"/>
+          <p:cNvSpPr txBox="1"/>
+          <p:nvPr/>
+        </p:nvSpPr>
+        <p:spPr>
+          <a:xfrm>
+            <a:off x="502920" y="274320"/>
+            <a:ext cx="640080" cy="365760"/>
+          </a:xfrm>
+          <a:prstGeom prst="rect">
+            <a:avLst/>
+          </a:prstGeom>
+          <a:noFill/>
+        </p:spPr>
+        <p:txBody>
+          <a:bodyPr wrap="square">
+            <a:normAutofit/>
+          </a:bodyPr>
+          <a:lstStyle/>
+          <a:p>
+            <a:pPr algn="l">
+              <a:spcAft>
+                <a:spcPts val="400"/>
+              </a:spcAft>
+            </a:pPr>
+            <a:r>
+              <a:rPr sz="1300" b="1">
+                <a:solidFill>
+                  <a:srgbClr val="0C6F7D"/>
+                </a:solidFill>
+                <a:latin typeface="Consolas"/>
+              </a:rPr>
+              <a:t>05</a:t>
+            </a:r>
+          </a:p>
+        </p:txBody>
+      </p:sp>
+      <p:sp>
+        <p:nvSpPr>
+          <p:cNvPr id="3" name="TextBox 2"/>
+          <p:cNvSpPr txBox="1"/>
+          <p:nvPr/>
+        </p:nvSpPr>
+        <p:spPr>
+          <a:xfrm>
+            <a:off x="1234440" y="164592"/>
+            <a:ext cx="7543800" cy="932688"/>
+          </a:xfrm>
+          <a:prstGeom prst="rect">
+            <a:avLst/>
+          </a:prstGeom>
+          <a:noFill/>
+        </p:spPr>
+        <p:txBody>
+          <a:bodyPr wrap="square">
+            <a:normAutofit/>
+          </a:bodyPr>
+          <a:lstStyle/>
+          <a:p>
+            <a:pPr algn="l">
+              <a:spcAft>
+                <a:spcPts val="400"/>
+              </a:spcAft>
+            </a:pPr>
+            <a:r>
+              <a:rPr sz="2200" b="1">
+                <a:solidFill>
+                  <a:srgbClr val="10171C"/>
+                </a:solidFill>
+                <a:latin typeface="Calibri"/>
+              </a:rPr>
+              <a:t>Method — how a reconstruction is scored</a:t>
+            </a:r>
+          </a:p>
+        </p:txBody>
+      </p:sp>
+      <p:sp>
+        <p:nvSpPr>
+          <p:cNvPr id="4" name="TextBox 3"/>
+          <p:cNvSpPr txBox="1"/>
+          <p:nvPr/>
+        </p:nvSpPr>
+        <p:spPr>
+          <a:xfrm>
+            <a:off x="9052560" y="292608"/>
+            <a:ext cx="2697480" cy="530352"/>
+          </a:xfrm>
+          <a:prstGeom prst="rect">
+            <a:avLst/>
+          </a:prstGeom>
+          <a:noFill/>
+        </p:spPr>
+        <p:txBody>
+          <a:bodyPr wrap="square">
+            <a:normAutofit/>
+          </a:bodyPr>
+          <a:lstStyle/>
+          <a:p>
+            <a:pPr algn="r">
+              <a:spcAft>
+                <a:spcPts val="400"/>
+              </a:spcAft>
+            </a:pPr>
+            <a:r>
+              <a:rPr sz="1100" b="0">
+                <a:solidFill>
+                  <a:srgbClr val="6B7C86"/>
+                </a:solidFill>
+                <a:latin typeface="Consolas"/>
+              </a:rPr>
+              <a:t>and what it is scored against</a:t>
+            </a:r>
+          </a:p>
+        </p:txBody>
+      </p:sp>
+      <p:sp>
+        <p:nvSpPr>
+          <p:cNvPr id="5" name="Rectangle 4"/>
+          <p:cNvSpPr/>
+          <p:nvPr/>
+        </p:nvSpPr>
+        <p:spPr>
+          <a:xfrm>
+            <a:off x="502920" y="1188720"/>
+            <a:ext cx="11155680" cy="27940"/>
+          </a:xfrm>
+          <a:prstGeom prst="rect">
+            <a:avLst/>
+          </a:prstGeom>
+          <a:solidFill>
+            <a:srgbClr val="10171C"/>
+          </a:solidFill>
+          <a:ln>
+            <a:noFill/>
+          </a:ln>
+          <a:effectLst/>
+        </p:spPr>
+        <p:style>
+          <a:lnRef idx="1">
+            <a:schemeClr val="accent1"/>
+          </a:lnRef>
+          <a:fillRef idx="3">
+            <a:schemeClr val="accent1"/>
+          </a:fillRef>
+          <a:effectRef idx="2">
+            <a:schemeClr val="accent1"/>
+          </a:effectRef>
+          <a:fontRef idx="minor">
+            <a:schemeClr val="lt1"/>
+          </a:fontRef>
+        </p:style>
+        <p:txBody>
+          <a:bodyPr rtlCol="0" anchor="ctr"/>
+          <a:lstStyle/>
+          <a:p>
+            <a:pPr algn="ctr"/>
+          </a:p>
+        </p:txBody>
+      </p:sp>
+      <p:sp>
+        <p:nvSpPr>
+          <p:cNvPr id="6" name="TextBox 5"/>
+          <p:cNvSpPr txBox="1"/>
+          <p:nvPr/>
+        </p:nvSpPr>
+        <p:spPr>
+          <a:xfrm>
+            <a:off x="502920" y="1417320"/>
+            <a:ext cx="5577840" cy="365760"/>
+          </a:xfrm>
+          <a:prstGeom prst="rect">
+            <a:avLst/>
+          </a:prstGeom>
+          <a:noFill/>
+        </p:spPr>
+        <p:txBody>
+          <a:bodyPr wrap="square">
+            <a:normAutofit/>
+          </a:bodyPr>
+          <a:lstStyle/>
+          <a:p>
+            <a:pPr algn="l">
+              <a:spcAft>
+                <a:spcPts val="400"/>
+              </a:spcAft>
+            </a:pPr>
+            <a:r>
+              <a:rPr sz="1400" b="1">
+                <a:solidFill>
+                  <a:srgbClr val="10171C"/>
+                </a:solidFill>
+                <a:latin typeface="Calibri"/>
+              </a:rPr>
+              <a:t>Both Chamfer directions, reported separately</a:t>
+            </a:r>
+          </a:p>
+        </p:txBody>
+      </p:sp>
+      <p:sp>
+        <p:nvSpPr>
+          <p:cNvPr id="7" name="TextBox 6"/>
+          <p:cNvSpPr txBox="1"/>
+          <p:nvPr/>
+        </p:nvSpPr>
+        <p:spPr>
+          <a:xfrm>
+            <a:off x="502920" y="1847088"/>
+            <a:ext cx="5577840" cy="1828800"/>
+          </a:xfrm>
+          <a:prstGeom prst="rect">
+            <a:avLst/>
+          </a:prstGeom>
+          <a:noFill/>
+        </p:spPr>
+        <p:txBody>
+          <a:bodyPr wrap="square">
+            <a:normAutofit/>
+          </a:bodyPr>
+          <a:lstStyle/>
+          <a:p>
+            <a:pPr algn="l">
+              <a:spcAft>
+                <a:spcPts val="400"/>
+              </a:spcAft>
+            </a:pPr>
+            <a:r>
+              <a:rPr sz="1250" b="1">
+                <a:solidFill>
+                  <a:srgbClr val="10171C"/>
+                </a:solidFill>
+                <a:latin typeface="Calibri"/>
+              </a:rPr>
+              <a:t>They fail differently, and the symmetric sum hides it.</a:t>
+            </a:r>
+          </a:p>
+          <a:p>
+            <a:pPr algn="l">
+              <a:spcAft>
+                <a:spcPts val="400"/>
+              </a:spcAft>
+            </a:pPr>
+            <a:r>
+              <a:rPr sz="1250" b="0">
+                <a:solidFill>
+                  <a:srgbClr val="3D4C55"/>
+                </a:solidFill>
+                <a:latin typeface="Calibri"/>
+              </a:rPr>
+              <a:t>pred → gt  is accuracy: it rises when the model puts points where no plant is.</a:t>
+            </a:r>
+          </a:p>
+          <a:p>
+            <a:pPr algn="l">
+              <a:spcAft>
+                <a:spcPts val="400"/>
+              </a:spcAft>
+            </a:pPr>
+            <a:r>
+              <a:rPr sz="1250" b="0">
+                <a:solidFill>
+                  <a:srgbClr val="3D4C55"/>
+                </a:solidFill>
+                <a:latin typeface="Calibri"/>
+              </a:rPr>
+              <a:t>gt → pred  is completeness: it rises when the model misses parts of the plant.</a:t>
+            </a:r>
+          </a:p>
+          <a:p>
+            <a:pPr algn="l">
+              <a:spcAft>
+                <a:spcPts val="400"/>
+              </a:spcAft>
+            </a:pPr>
+            <a:r>
+              <a:rPr sz="1250" b="0">
+                <a:solidFill>
+                  <a:srgbClr val="6B7C86"/>
+                </a:solidFill>
+                <a:latin typeface="Calibri"/>
+              </a:rPr>
+              <a:t>A cloud that collapses to a dense blob scores well on accuracy and badly on completeness.</a:t>
+            </a:r>
+          </a:p>
+        </p:txBody>
+      </p:sp>
+      <p:sp>
+        <p:nvSpPr>
+          <p:cNvPr id="8" name="TextBox 7"/>
+          <p:cNvSpPr txBox="1"/>
+          <p:nvPr/>
+        </p:nvSpPr>
+        <p:spPr>
+          <a:xfrm>
+            <a:off x="502920" y="3886200"/>
+            <a:ext cx="5577840" cy="2103120"/>
+          </a:xfrm>
+          <a:prstGeom prst="rect">
+            <a:avLst/>
+          </a:prstGeom>
+          <a:noFill/>
+        </p:spPr>
+        <p:txBody>
+          <a:bodyPr wrap="square">
+            <a:normAutofit/>
+          </a:bodyPr>
+          <a:lstStyle/>
+          <a:p>
+            <a:pPr algn="l">
+              <a:spcAft>
+                <a:spcPts val="400"/>
+              </a:spcAft>
+            </a:pPr>
+            <a:r>
+              <a:rPr sz="1250" b="1">
+                <a:solidFill>
+                  <a:srgbClr val="10171C"/>
+                </a:solidFill>
+                <a:latin typeface="Calibri"/>
+              </a:rPr>
+              <a:t>On the test split our model is 0.000293 accuracy against 0.000498 completeness —</a:t>
+            </a:r>
+          </a:p>
+          <a:p>
+            <a:pPr algn="l">
+              <a:spcAft>
+                <a:spcPts val="400"/>
+              </a:spcAft>
+            </a:pPr>
+            <a:r>
+              <a:rPr sz="1250" b="0">
+                <a:solidFill>
+                  <a:srgbClr val="3D4C55"/>
+                </a:solidFill>
+                <a:latin typeface="Calibri"/>
+              </a:rPr>
+              <a:t>it misses real geometry roughly twice as often as it invents geometry. That is the same failure the red points in the next figures show, arrived at independently.</a:t>
+            </a:r>
+          </a:p>
+        </p:txBody>
+      </p:sp>
+      <p:sp>
+        <p:nvSpPr>
+          <p:cNvPr id="9" name="TextBox 8"/>
+          <p:cNvSpPr txBox="1"/>
+          <p:nvPr/>
+        </p:nvSpPr>
+        <p:spPr>
+          <a:xfrm>
+            <a:off x="6492240" y="1417320"/>
+            <a:ext cx="5212080" cy="365760"/>
+          </a:xfrm>
+          <a:prstGeom prst="rect">
+            <a:avLst/>
+          </a:prstGeom>
+          <a:noFill/>
+        </p:spPr>
+        <p:txBody>
+          <a:bodyPr wrap="square">
+            <a:normAutofit/>
+          </a:bodyPr>
+          <a:lstStyle/>
+          <a:p>
+            <a:pPr algn="l">
+              <a:spcAft>
+                <a:spcPts val="400"/>
+              </a:spcAft>
+            </a:pPr>
+            <a:r>
+              <a:rPr sz="1400" b="1">
+                <a:solidFill>
+                  <a:srgbClr val="10171C"/>
+                </a:solidFill>
+                <a:latin typeface="Calibri"/>
+              </a:rPr>
+              <a:t>Two baselines bracket the number</a:t>
+            </a:r>
+          </a:p>
+        </p:txBody>
+      </p:sp>
+      <p:graphicFrame>
+        <p:nvGraphicFramePr>
+          <p:cNvPr id="10" name="Table 9"/>
+          <p:cNvGraphicFramePr>
+            <a:graphicFrameLocks noGrp="1"/>
+          </p:cNvGraphicFramePr>
+          <p:nvPr/>
+        </p:nvGraphicFramePr>
+        <p:xfrm>
+          <a:off x="6492240" y="1847088"/>
+          <a:ext cx="5120640" cy="1828800"/>
+        </p:xfrm>
+        <a:graphic>
+          <a:graphicData uri="http://schemas.openxmlformats.org/drawingml/2006/table">
+            <a:tbl>
+              <a:tblPr firstRow="1" bandRow="1">
+                <a:tableStyleId>{5C22544A-7EE6-4342-B048-85BDC9FD1C3A}</a:tableStyleId>
+              </a:tblPr>
+              <a:tblGrid>
+                <a:gridCol w="3291840"/>
+                <a:gridCol w="1828800"/>
+              </a:tblGrid>
+              <a:tr h="457200">
+                <a:tc>
+                  <a:txBody>
+                    <a:bodyPr/>
+                    <a:lstStyle/>
+                    <a:p>
+                      <a:r>
+                        <a:rPr sz="1150" b="1">
+                          <a:solidFill>
+                            <a:srgbClr val="10171C"/>
+                          </a:solidFill>
+                        </a:rPr>
+                        <a:t>what is compared</a:t>
+                      </a:r>
+                    </a:p>
+                  </a:txBody>
+                  <a:tcPr/>
+                </a:tc>
+                <a:tc>
+                  <a:txBody>
+                    <a:bodyPr/>
+                    <a:lstStyle/>
+                    <a:p>
+                      <a:r>
+                        <a:rPr sz="1150" b="1">
+                          <a:solidFill>
+                            <a:srgbClr val="10171C"/>
+                          </a:solidFill>
+                        </a:rPr>
+                        <a:t>mean chamfer</a:t>
+                      </a:r>
+                    </a:p>
+                  </a:txBody>
+                  <a:tcPr/>
+                </a:tc>
+              </a:tr>
+              <a:tr h="457200">
+                <a:tc>
+                  <a:txBody>
+                    <a:bodyPr/>
+                    <a:lstStyle/>
+                    <a:p>
+                      <a:r>
+                        <a:rPr sz="1150" b="1">
+                          <a:solidFill>
+                            <a:srgbClr val="0C6F7D"/>
+                          </a:solidFill>
+                        </a:rPr>
+                        <a:t>our prediction vs its own plant</a:t>
+                      </a:r>
+                    </a:p>
+                  </a:txBody>
+                  <a:tcPr/>
+                </a:tc>
+                <a:tc>
+                  <a:txBody>
+                    <a:bodyPr/>
+                    <a:lstStyle/>
+                    <a:p>
+                      <a:r>
+                        <a:rPr sz="1150" b="1">
+                          <a:solidFill>
+                            <a:srgbClr val="0C6F7D"/>
+                          </a:solidFill>
+                        </a:rPr>
+                        <a:t>0.000791</a:t>
+                      </a:r>
+                    </a:p>
+                  </a:txBody>
+                  <a:tcPr/>
+                </a:tc>
+              </a:tr>
+              <a:tr h="457200">
+                <a:tc>
+                  <a:txBody>
+                    <a:bodyPr/>
+                    <a:lstStyle/>
+                    <a:p>
+                      <a:r>
+                        <a:rPr sz="1150" b="0">
+                          <a:solidFill>
+                            <a:srgbClr val="3D4C55"/>
+                          </a:solidFill>
+                        </a:rPr>
+                        <a:t>our prediction vs a DIFFERENT plant</a:t>
+                      </a:r>
+                    </a:p>
+                  </a:txBody>
+                  <a:tcPr/>
+                </a:tc>
+                <a:tc>
+                  <a:txBody>
+                    <a:bodyPr/>
+                    <a:lstStyle/>
+                    <a:p>
+                      <a:r>
+                        <a:rPr sz="1150" b="0">
+                          <a:solidFill>
+                            <a:srgbClr val="3D4C55"/>
+                          </a:solidFill>
+                        </a:rPr>
+                        <a:t>0.039932</a:t>
+                      </a:r>
+                    </a:p>
+                  </a:txBody>
+                  <a:tcPr/>
+                </a:tc>
+              </a:tr>
+              <a:tr h="457200">
+                <a:tc>
+                  <a:txBody>
+                    <a:bodyPr/>
+                    <a:lstStyle/>
+                    <a:p>
+                      <a:r>
+                        <a:rPr sz="1150" b="0">
+                          <a:solidFill>
+                            <a:srgbClr val="3D4C55"/>
+                          </a:solidFill>
+                        </a:rPr>
+                        <a:t>another plant's GT used as the prediction</a:t>
+                      </a:r>
+                    </a:p>
+                  </a:txBody>
+                  <a:tcPr/>
+                </a:tc>
+                <a:tc>
+                  <a:txBody>
+                    <a:bodyPr/>
+                    <a:lstStyle/>
+                    <a:p>
+                      <a:r>
+                        <a:rPr sz="1150" b="0">
+                          <a:solidFill>
+                            <a:srgbClr val="3D4C55"/>
+                          </a:solidFill>
+                        </a:rPr>
+                        <a:t>0.049264</a:t>
+                      </a:r>
+                    </a:p>
+                  </a:txBody>
+                  <a:tcPr/>
+                </a:tc>
+              </a:tr>
+            </a:tbl>
+          </a:graphicData>
+        </a:graphic>
+      </p:graphicFrame>
+      <p:sp>
+        <p:nvSpPr>
+          <p:cNvPr id="11" name="TextBox 10"/>
+          <p:cNvSpPr txBox="1"/>
+          <p:nvPr/>
+        </p:nvSpPr>
+        <p:spPr>
+          <a:xfrm>
+            <a:off x="6492240" y="3886200"/>
+            <a:ext cx="5212080" cy="2103120"/>
+          </a:xfrm>
+          <a:prstGeom prst="rect">
+            <a:avLst/>
+          </a:prstGeom>
+          <a:noFill/>
+        </p:spPr>
+        <p:txBody>
+          <a:bodyPr wrap="square">
+            <a:normAutofit/>
+          </a:bodyPr>
+          <a:lstStyle/>
+          <a:p>
+            <a:pPr algn="l">
+              <a:spcAft>
+                <a:spcPts val="400"/>
+              </a:spcAft>
+            </a:pPr>
+            <a:r>
+              <a:rPr sz="1300" b="1">
+                <a:solidFill>
+                  <a:srgbClr val="10171C"/>
+                </a:solidFill>
+                <a:latin typeface="Calibri"/>
+              </a:rPr>
+              <a:t>Why the floor is not zero.</a:t>
+            </a:r>
+          </a:p>
+          <a:p>
+            <a:pPr algn="l">
+              <a:spcAft>
+                <a:spcPts val="400"/>
+              </a:spcAft>
+            </a:pPr>
+            <a:r>
+              <a:rPr sz="1250" b="0">
+                <a:solidFill>
+                  <a:srgbClr val="3D4C55"/>
+                </a:solidFill>
+                <a:latin typeface="Calibri"/>
+              </a:rPr>
+              <a:t>Clouds are centred and unit-sphere normalised, so every sorghum already overlaps every other one. A model that learned nothing plant-specific lands at 0.049 — the average-sorghum floor — not at zero.</a:t>
+            </a:r>
+          </a:p>
+          <a:p>
+            <a:pPr algn="l">
+              <a:spcAft>
+                <a:spcPts val="400"/>
+              </a:spcAft>
+            </a:pPr>
+            <a:r>
+              <a:rPr sz="700" b="0">
+                <a:solidFill>
+                  <a:srgbClr val="3D4C55"/>
+                </a:solidFill>
+                <a:latin typeface="Calibri"/>
+              </a:rPr>
+              <a:t/>
+            </a:r>
+          </a:p>
+          <a:p>
+            <a:pPr algn="l">
+              <a:spcAft>
+                <a:spcPts val="400"/>
+              </a:spcAft>
+            </a:pPr>
+            <a:r>
+              <a:rPr sz="1400" b="1">
+                <a:solidFill>
+                  <a:srgbClr val="0C6F7D"/>
+                </a:solidFill>
+                <a:latin typeface="Calibri"/>
+              </a:rPr>
+              <a:t>skill = 1 − model ÷ floor = 98.4%</a:t>
+            </a:r>
+          </a:p>
+        </p:txBody>
+      </p:sp>
+    </p:spTree>
+  </p:cSld>
+  <p:clrMapOvr>
+    <a:masterClrMapping/>
+  </p:clrMapOvr>
+</p:sld>
+</file>
+
+<file path=ppt/slides/slide7.xml><?xml version="1.0" encoding="utf-8"?>
+<p:sld xmlns:a="http://schemas.openxmlformats.org/drawingml/2006/main" xmlns:p="http://schemas.openxmlformats.org/presentationml/2006/main" xmlns:r="http://schemas.openxmlformats.org/officeDocument/2006/relationships">
+  <p:cSld>
+    <p:bg>
+      <p:bgPr>
+        <a:solidFill>
+          <a:srgbClr val="FFFFFF"/>
+        </a:solidFill>
+        <a:effectLst/>
+      </p:bgPr>
+    </p:bg>
+    <p:spTree>
+      <p:nvGrpSpPr>
+        <p:cNvPr id="1" name=""/>
+        <p:cNvGrpSpPr/>
+        <p:nvPr/>
+      </p:nvGrpSpPr>
+      <p:grpSpPr/>
+      <p:sp>
+        <p:nvSpPr>
+          <p:cNvPr id="2" name="TextBox 1"/>
+          <p:cNvSpPr txBox="1"/>
+          <p:nvPr/>
+        </p:nvSpPr>
+        <p:spPr>
+          <a:xfrm>
+            <a:off x="502920" y="274320"/>
+            <a:ext cx="640080" cy="365760"/>
+          </a:xfrm>
+          <a:prstGeom prst="rect">
+            <a:avLst/>
+          </a:prstGeom>
+          <a:noFill/>
+        </p:spPr>
+        <p:txBody>
+          <a:bodyPr wrap="square">
+            <a:normAutofit/>
+          </a:bodyPr>
+          <a:lstStyle/>
+          <a:p>
+            <a:pPr algn="l">
+              <a:spcAft>
+                <a:spcPts val="400"/>
+              </a:spcAft>
+            </a:pPr>
+            <a:r>
+              <a:rPr sz="1300" b="1">
+                <a:solidFill>
+                  <a:srgbClr val="0C6F7D"/>
+                </a:solidFill>
+                <a:latin typeface="Consolas"/>
+              </a:rPr>
+              <a:t>06</a:t>
+            </a:r>
+          </a:p>
+        </p:txBody>
+      </p:sp>
+      <p:sp>
+        <p:nvSpPr>
+          <p:cNvPr id="3" name="TextBox 2"/>
+          <p:cNvSpPr txBox="1"/>
+          <p:nvPr/>
+        </p:nvSpPr>
+        <p:spPr>
+          <a:xfrm>
+            <a:off x="1234440" y="164592"/>
+            <a:ext cx="7543800" cy="932688"/>
+          </a:xfrm>
+          <a:prstGeom prst="rect">
+            <a:avLst/>
+          </a:prstGeom>
+          <a:noFill/>
+        </p:spPr>
+        <p:txBody>
+          <a:bodyPr wrap="square">
+            <a:normAutofit/>
+          </a:bodyPr>
+          <a:lstStyle/>
+          <a:p>
+            <a:pPr algn="l">
+              <a:spcAft>
+                <a:spcPts val="400"/>
+              </a:spcAft>
+            </a:pPr>
+            <a:r>
+              <a:rPr sz="2200" b="1">
+                <a:solidFill>
+                  <a:srgbClr val="10171C"/>
+                </a:solidFill>
+                <a:latin typeface="Calibri"/>
+              </a:rPr>
+              <a:t>Generating a point cloud from one image</a:t>
+            </a:r>
+          </a:p>
+        </p:txBody>
+      </p:sp>
+      <p:sp>
+        <p:nvSpPr>
+          <p:cNvPr id="4" name="TextBox 3"/>
+          <p:cNvSpPr txBox="1"/>
+          <p:nvPr/>
+        </p:nvSpPr>
+        <p:spPr>
+          <a:xfrm>
+            <a:off x="9052560" y="292608"/>
+            <a:ext cx="2697480" cy="530352"/>
+          </a:xfrm>
+          <a:prstGeom prst="rect">
+            <a:avLst/>
+          </a:prstGeom>
+          <a:noFill/>
+        </p:spPr>
+        <p:txBody>
+          <a:bodyPr wrap="square">
+            <a:normAutofit/>
+          </a:bodyPr>
+          <a:lstStyle/>
+          <a:p>
+            <a:pPr algn="r">
+              <a:spcAft>
+                <a:spcPts val="400"/>
+              </a:spcAft>
+            </a:pPr>
+            <a:r>
+              <a:rPr sz="1100" b="0">
+                <a:solidFill>
+                  <a:srgbClr val="6B7C86"/>
+                </a:solidFill>
+                <a:latin typeface="Consolas"/>
+              </a:rPr>
+              <a:t>held-out TEST split · 2,250 plants</a:t>
+            </a:r>
+          </a:p>
+        </p:txBody>
+      </p:sp>
+      <p:sp>
+        <p:nvSpPr>
+          <p:cNvPr id="5" name="Rectangle 4"/>
+          <p:cNvSpPr/>
+          <p:nvPr/>
+        </p:nvSpPr>
+        <p:spPr>
+          <a:xfrm>
+            <a:off x="502920" y="1188720"/>
+            <a:ext cx="11155680" cy="27940"/>
+          </a:xfrm>
+          <a:prstGeom prst="rect">
+            <a:avLst/>
+          </a:prstGeom>
+          <a:solidFill>
+            <a:srgbClr val="10171C"/>
+          </a:solidFill>
+          <a:ln>
+            <a:noFill/>
+          </a:ln>
+          <a:effectLst/>
+        </p:spPr>
+        <p:style>
+          <a:lnRef idx="1">
+            <a:schemeClr val="accent1"/>
+          </a:lnRef>
+          <a:fillRef idx="3">
+            <a:schemeClr val="accent1"/>
+          </a:fillRef>
+          <a:effectRef idx="2">
+            <a:schemeClr val="accent1"/>
+          </a:effectRef>
+          <a:fontRef idx="minor">
+            <a:schemeClr val="lt1"/>
+          </a:fontRef>
+        </p:style>
+        <p:txBody>
+          <a:bodyPr rtlCol="0" anchor="ctr"/>
+          <a:lstStyle/>
+          <a:p>
+            <a:pPr algn="ctr"/>
+          </a:p>
+        </p:txBody>
+      </p:sp>
+      <p:sp>
+        <p:nvSpPr>
+          <p:cNvPr id="6" name="TextBox 5"/>
+          <p:cNvSpPr txBox="1"/>
+          <p:nvPr/>
+        </p:nvSpPr>
+        <p:spPr>
+          <a:xfrm>
+            <a:off x="502920" y="1417320"/>
+            <a:ext cx="6766560" cy="365760"/>
+          </a:xfrm>
+          <a:prstGeom prst="rect">
+            <a:avLst/>
+          </a:prstGeom>
+          <a:noFill/>
+        </p:spPr>
+        <p:txBody>
+          <a:bodyPr wrap="square">
+            <a:normAutofit/>
+          </a:bodyPr>
+          <a:lstStyle/>
+          <a:p>
+            <a:pPr algn="l">
+              <a:spcAft>
+                <a:spcPts val="400"/>
+              </a:spcAft>
+            </a:pPr>
+            <a:r>
+              <a:rPr sz="1400" b="1">
+                <a:solidFill>
+                  <a:srgbClr val="10171C"/>
+                </a:solidFill>
+                <a:latin typeface="Calibri"/>
+              </a:rPr>
+              <a:t>RGB → point cloud, and depth → point cloud</a:t>
+            </a:r>
+          </a:p>
+        </p:txBody>
+      </p:sp>
+      <p:graphicFrame>
+        <p:nvGraphicFramePr>
+          <p:cNvPr id="7" name="Table 6"/>
+          <p:cNvGraphicFramePr>
+            <a:graphicFrameLocks noGrp="1"/>
+          </p:cNvGraphicFramePr>
+          <p:nvPr/>
+        </p:nvGraphicFramePr>
+        <p:xfrm>
+          <a:off x="502920" y="1847088"/>
+          <a:ext cx="6766560" cy="2377440"/>
+        </p:xfrm>
+        <a:graphic>
+          <a:graphicData uri="http://schemas.openxmlformats.org/drawingml/2006/table">
+            <a:tbl>
+              <a:tblPr firstRow="1" bandRow="1">
+                <a:tableStyleId>{5C22544A-7EE6-4342-B048-85BDC9FD1C3A}</a:tableStyleId>
+              </a:tblPr>
+              <a:tblGrid>
+                <a:gridCol w="2926080"/>
+                <a:gridCol w="914400"/>
+                <a:gridCol w="1463040"/>
+                <a:gridCol w="1463040"/>
+              </a:tblGrid>
+              <a:tr h="396240">
+                <a:tc>
+                  <a:txBody>
+                    <a:bodyPr/>
+                    <a:lstStyle/>
+                    <a:p>
+                      <a:r>
+                        <a:rPr sz="1150" b="1">
+                          <a:solidFill>
+                            <a:srgbClr val="10171C"/>
+                          </a:solidFill>
+                        </a:rPr>
+                        <a:t>model</a:t>
+                      </a:r>
+                    </a:p>
+                  </a:txBody>
+                  <a:tcPr/>
+                </a:tc>
+                <a:tc>
+                  <a:txBody>
+                    <a:bodyPr/>
+                    <a:lstStyle/>
+                    <a:p>
+                      <a:r>
+                        <a:rPr sz="1150" b="1">
+                          <a:solidFill>
+                            <a:srgbClr val="10171C"/>
+                          </a:solidFill>
+                        </a:rPr>
+                        <a:t>source</a:t>
+                      </a:r>
+                    </a:p>
+                  </a:txBody>
+                  <a:tcPr/>
+                </a:tc>
+                <a:tc>
+                  <a:txBody>
+                    <a:bodyPr/>
+                    <a:lstStyle/>
+                    <a:p>
+                      <a:r>
+                        <a:rPr sz="1150" b="1">
+                          <a:solidFill>
+                            <a:srgbClr val="10171C"/>
+                          </a:solidFill>
+                        </a:rPr>
+                        <a:t>mean chamfer</a:t>
+                      </a:r>
+                    </a:p>
+                  </a:txBody>
+                  <a:tcPr/>
+                </a:tc>
+                <a:tc>
+                  <a:txBody>
+                    <a:bodyPr/>
+                    <a:lstStyle/>
+                    <a:p>
+                      <a:r>
+                        <a:rPr sz="1150" b="1">
+                          <a:solidFill>
+                            <a:srgbClr val="10171C"/>
+                          </a:solidFill>
+                        </a:rPr>
+                        <a:t>skill</a:t>
+                      </a:r>
+                    </a:p>
+                  </a:txBody>
+                  <a:tcPr/>
+                </a:tc>
+              </a:tr>
+              <a:tr h="396240">
+                <a:tc>
+                  <a:txBody>
+                    <a:bodyPr/>
+                    <a:lstStyle/>
+                    <a:p>
+                      <a:r>
+                        <a:rPr sz="1150" b="0">
+                          <a:solidFill>
+                            <a:srgbClr val="3D4C55"/>
+                          </a:solidFill>
+                        </a:rPr>
+                        <a:t>warm start, no distillation</a:t>
+                      </a:r>
+                    </a:p>
+                  </a:txBody>
+                  <a:tcPr/>
+                </a:tc>
+                <a:tc>
+                  <a:txBody>
+                    <a:bodyPr/>
+                    <a:lstStyle/>
+                    <a:p>
+                      <a:r>
+                        <a:rPr sz="1150" b="0">
+                          <a:solidFill>
+                            <a:srgbClr val="3D4C55"/>
+                          </a:solidFill>
+                        </a:rPr>
+                        <a:t>RGB</a:t>
+                      </a:r>
+                    </a:p>
+                  </a:txBody>
+                  <a:tcPr/>
+                </a:tc>
+                <a:tc>
+                  <a:txBody>
+                    <a:bodyPr/>
+                    <a:lstStyle/>
+                    <a:p>
+                      <a:r>
+                        <a:rPr sz="1150" b="0">
+                          <a:solidFill>
+                            <a:srgbClr val="3D4C55"/>
+                          </a:solidFill>
+                        </a:rPr>
+                        <a:t>0.000998</a:t>
+                      </a:r>
+                    </a:p>
+                  </a:txBody>
+                  <a:tcPr/>
+                </a:tc>
+                <a:tc>
+                  <a:txBody>
+                    <a:bodyPr/>
+                    <a:lstStyle/>
+                    <a:p>
+                      <a:r>
+                        <a:rPr sz="1150" b="0">
+                          <a:solidFill>
+                            <a:srgbClr val="3D4C55"/>
+                          </a:solidFill>
+                        </a:rPr>
+                        <a:t>98.0%</a:t>
+                      </a:r>
+                    </a:p>
+                  </a:txBody>
+                  <a:tcPr/>
+                </a:tc>
+              </a:tr>
+              <a:tr h="396240">
+                <a:tc>
+                  <a:txBody>
+                    <a:bodyPr/>
+                    <a:lstStyle/>
+                    <a:p>
+                      <a:r>
+                        <a:rPr sz="1150" b="0">
+                          <a:solidFill>
+                            <a:srgbClr val="3D4C55"/>
+                          </a:solidFill>
+                        </a:rPr>
+                        <a:t>+ cross-modal distillation</a:t>
+                      </a:r>
+                    </a:p>
+                  </a:txBody>
+                  <a:tcPr/>
+                </a:tc>
+                <a:tc>
+                  <a:txBody>
+                    <a:bodyPr/>
+                    <a:lstStyle/>
+                    <a:p>
+                      <a:r>
+                        <a:rPr sz="1150" b="0">
+                          <a:solidFill>
+                            <a:srgbClr val="3D4C55"/>
+                          </a:solidFill>
+                        </a:rPr>
+                        <a:t>RGB</a:t>
+                      </a:r>
+                    </a:p>
+                  </a:txBody>
+                  <a:tcPr/>
+                </a:tc>
+                <a:tc>
+                  <a:txBody>
+                    <a:bodyPr/>
+                    <a:lstStyle/>
+                    <a:p>
+                      <a:r>
+                        <a:rPr sz="1150" b="0">
+                          <a:solidFill>
+                            <a:srgbClr val="3D4C55"/>
+                          </a:solidFill>
+                        </a:rPr>
+                        <a:t>0.000840</a:t>
+                      </a:r>
+                    </a:p>
+                  </a:txBody>
+                  <a:tcPr/>
+                </a:tc>
+                <a:tc>
+                  <a:txBody>
+                    <a:bodyPr/>
+                    <a:lstStyle/>
+                    <a:p>
+                      <a:r>
+                        <a:rPr sz="1150" b="0">
+                          <a:solidFill>
+                            <a:srgbClr val="3D4C55"/>
+                          </a:solidFill>
+                        </a:rPr>
+                        <a:t>98.3%</a:t>
+                      </a:r>
+                    </a:p>
+                  </a:txBody>
+                  <a:tcPr/>
+                </a:tc>
+              </a:tr>
+              <a:tr h="396240">
+                <a:tc>
+                  <a:txBody>
+                    <a:bodyPr/>
+                    <a:lstStyle/>
+                    <a:p>
+                      <a:r>
+                        <a:rPr sz="1150" b="0">
+                          <a:solidFill>
+                            <a:srgbClr val="3D4C55"/>
+                          </a:solidFill>
+                        </a:rPr>
+                        <a:t>+ 50% source masking, seed 1</a:t>
+                      </a:r>
+                    </a:p>
+                  </a:txBody>
+                  <a:tcPr/>
+                </a:tc>
+                <a:tc>
+                  <a:txBody>
+                    <a:bodyPr/>
+                    <a:lstStyle/>
+                    <a:p>
+                      <a:r>
+                        <a:rPr sz="1150" b="0">
+                          <a:solidFill>
+                            <a:srgbClr val="3D4C55"/>
+                          </a:solidFill>
+                        </a:rPr>
+                        <a:t>RGB</a:t>
+                      </a:r>
+                    </a:p>
+                  </a:txBody>
+                  <a:tcPr/>
+                </a:tc>
+                <a:tc>
+                  <a:txBody>
+                    <a:bodyPr/>
+                    <a:lstStyle/>
+                    <a:p>
+                      <a:r>
+                        <a:rPr sz="1150" b="0">
+                          <a:solidFill>
+                            <a:srgbClr val="3D4C55"/>
+                          </a:solidFill>
+                        </a:rPr>
+                        <a:t>0.000791</a:t>
+                      </a:r>
+                    </a:p>
+                  </a:txBody>
+                  <a:tcPr/>
+                </a:tc>
+                <a:tc>
+                  <a:txBody>
+                    <a:bodyPr/>
+                    <a:lstStyle/>
+                    <a:p>
+                      <a:r>
+                        <a:rPr sz="1150" b="0">
+                          <a:solidFill>
+                            <a:srgbClr val="3D4C55"/>
+                          </a:solidFill>
+                        </a:rPr>
+                        <a:t>98.4%</a:t>
+                      </a:r>
+                    </a:p>
+                  </a:txBody>
+                  <a:tcPr/>
+                </a:tc>
+              </a:tr>
+              <a:tr h="396240">
+                <a:tc>
+                  <a:txBody>
+                    <a:bodyPr/>
+                    <a:lstStyle/>
+                    <a:p>
+                      <a:r>
+                        <a:rPr sz="1150" b="0">
+                          <a:solidFill>
+                            <a:srgbClr val="3D4C55"/>
+                          </a:solidFill>
+                        </a:rPr>
+                        <a:t>+ 50% source masking, seed 2</a:t>
+                      </a:r>
+                    </a:p>
+                  </a:txBody>
+                  <a:tcPr/>
+                </a:tc>
+                <a:tc>
+                  <a:txBody>
+                    <a:bodyPr/>
+                    <a:lstStyle/>
+                    <a:p>
+                      <a:r>
+                        <a:rPr sz="1150" b="0">
+                          <a:solidFill>
+                            <a:srgbClr val="3D4C55"/>
+                          </a:solidFill>
+                        </a:rPr>
+                        <a:t>RGB</a:t>
+                      </a:r>
+                    </a:p>
+                  </a:txBody>
+                  <a:tcPr/>
+                </a:tc>
+                <a:tc>
+                  <a:txBody>
+                    <a:bodyPr/>
+                    <a:lstStyle/>
+                    <a:p>
+                      <a:r>
+                        <a:rPr sz="1150" b="0">
+                          <a:solidFill>
+                            <a:srgbClr val="3D4C55"/>
+                          </a:solidFill>
+                        </a:rPr>
+                        <a:t>0.000792</a:t>
+                      </a:r>
+                    </a:p>
+                  </a:txBody>
+                  <a:tcPr/>
+                </a:tc>
+                <a:tc>
+                  <a:txBody>
+                    <a:bodyPr/>
+                    <a:lstStyle/>
+                    <a:p>
+                      <a:r>
+                        <a:rPr sz="1150" b="0">
+                          <a:solidFill>
+                            <a:srgbClr val="3D4C55"/>
+                          </a:solidFill>
+                        </a:rPr>
+                        <a:t>98.4%</a:t>
+                      </a:r>
+                    </a:p>
+                  </a:txBody>
+                  <a:tcPr/>
+                </a:tc>
+              </a:tr>
+              <a:tr h="396240">
+                <a:tc>
+                  <a:txBody>
+                    <a:bodyPr/>
+                    <a:lstStyle/>
+                    <a:p>
+                      <a:r>
+                        <a:rPr sz="1150" b="1">
+                          <a:solidFill>
+                            <a:srgbClr val="0C6F7D"/>
+                          </a:solidFill>
+                        </a:rPr>
+                        <a:t>distilled generalist</a:t>
+                      </a:r>
+                    </a:p>
+                  </a:txBody>
+                  <a:tcPr/>
+                </a:tc>
+                <a:tc>
+                  <a:txBody>
+                    <a:bodyPr/>
+                    <a:lstStyle/>
+                    <a:p>
+                      <a:r>
+                        <a:rPr sz="1150" b="1">
+                          <a:solidFill>
+                            <a:srgbClr val="0C6F7D"/>
+                          </a:solidFill>
+                        </a:rPr>
+                        <a:t>depth</a:t>
+                      </a:r>
+                    </a:p>
+                  </a:txBody>
+                  <a:tcPr/>
+                </a:tc>
+                <a:tc>
+                  <a:txBody>
+                    <a:bodyPr/>
+                    <a:lstStyle/>
+                    <a:p>
+                      <a:r>
+                        <a:rPr sz="1150" b="1">
+                          <a:solidFill>
+                            <a:srgbClr val="0C6F7D"/>
+                          </a:solidFill>
+                        </a:rPr>
+                        <a:t>0.000620</a:t>
+                      </a:r>
+                    </a:p>
+                  </a:txBody>
+                  <a:tcPr/>
+                </a:tc>
+                <a:tc>
+                  <a:txBody>
+                    <a:bodyPr/>
+                    <a:lstStyle/>
+                    <a:p>
+                      <a:r>
+                        <a:rPr sz="1150" b="1">
+                          <a:solidFill>
+                            <a:srgbClr val="0C6F7D"/>
+                          </a:solidFill>
+                        </a:rPr>
+                        <a:t>98.7%</a:t>
+                      </a:r>
+                    </a:p>
+                  </a:txBody>
+                  <a:tcPr/>
+                </a:tc>
+              </a:tr>
+            </a:tbl>
+          </a:graphicData>
+        </a:graphic>
+      </p:graphicFrame>
+      <p:sp>
+        <p:nvSpPr>
+          <p:cNvPr id="8" name="TextBox 7"/>
+          <p:cNvSpPr txBox="1"/>
+          <p:nvPr/>
+        </p:nvSpPr>
+        <p:spPr>
+          <a:xfrm>
+            <a:off x="502920" y="4434840"/>
+            <a:ext cx="6766560" cy="1737360"/>
+          </a:xfrm>
+          <a:prstGeom prst="rect">
+            <a:avLst/>
+          </a:prstGeom>
+          <a:noFill/>
+        </p:spPr>
+        <p:txBody>
+          <a:bodyPr wrap="square">
+            <a:normAutofit/>
+          </a:bodyPr>
+          <a:lstStyle/>
+          <a:p>
+            <a:pPr algn="l">
+              <a:spcAft>
+                <a:spcPts val="400"/>
+              </a:spcAft>
+            </a:pPr>
+            <a:r>
+              <a:rPr sz="1250" b="0">
+                <a:solidFill>
+                  <a:srgbClr val="3D4C55"/>
+                </a:solidFill>
+                <a:latin typeface="Calibri"/>
+              </a:rPr>
+              <a:t>Every row is 2,250 unseen plants, and the two seeds agree to the fourth decimal — source masking reproduces rather than being one lucky run.</a:t>
+            </a:r>
+          </a:p>
+        </p:txBody>
+      </p:sp>
+      <p:sp>
+        <p:nvSpPr>
+          <p:cNvPr id="9" name="TextBox 8"/>
+          <p:cNvSpPr txBox="1"/>
+          <p:nvPr/>
+        </p:nvSpPr>
+        <p:spPr>
+          <a:xfrm>
+            <a:off x="7543800" y="1417320"/>
+            <a:ext cx="4160520" cy="4754880"/>
+          </a:xfrm>
+          <a:prstGeom prst="rect">
+            <a:avLst/>
+          </a:prstGeom>
+          <a:noFill/>
+        </p:spPr>
+        <p:txBody>
+          <a:bodyPr wrap="square">
+            <a:normAutofit/>
+          </a:bodyPr>
+          <a:lstStyle/>
+          <a:p>
+            <a:pPr algn="l">
+              <a:spcAft>
+                <a:spcPts val="400"/>
+              </a:spcAft>
+            </a:pPr>
+            <a:r>
+              <a:rPr sz="1400" b="1">
+                <a:solidFill>
+                  <a:srgbClr val="10171C"/>
+                </a:solidFill>
+                <a:latin typeface="Calibri"/>
+              </a:rPr>
+              <a:t>Three things to take from this</a:t>
+            </a:r>
+          </a:p>
+          <a:p>
+            <a:pPr algn="l">
+              <a:spcAft>
+                <a:spcPts val="400"/>
+              </a:spcAft>
+            </a:pPr>
+            <a:r>
+              <a:rPr sz="700" b="0">
+                <a:solidFill>
+                  <a:srgbClr val="3D4C55"/>
+                </a:solidFill>
+                <a:latin typeface="Calibri"/>
+              </a:rPr>
+              <a:t/>
+            </a:r>
+          </a:p>
+          <a:p>
+            <a:pPr algn="l">
+              <a:spcAft>
+                <a:spcPts val="400"/>
+              </a:spcAft>
+            </a:pPr>
+            <a:r>
+              <a:rPr sz="1300" b="1">
+                <a:solidFill>
+                  <a:srgbClr val="0C6F7D"/>
+                </a:solidFill>
+                <a:latin typeface="Calibri"/>
+              </a:rPr>
+              <a:t>Distillation pays on test, not just val.</a:t>
+            </a:r>
+          </a:p>
+          <a:p>
+            <a:pPr algn="l">
+              <a:spcAft>
+                <a:spcPts val="400"/>
+              </a:spcAft>
+            </a:pPr>
+            <a:r>
+              <a:rPr sz="1250" b="0">
+                <a:solidFill>
+                  <a:srgbClr val="3D4C55"/>
+                </a:solidFill>
+                <a:latin typeface="Calibri"/>
+              </a:rPr>
+              <a:t>0.000998 → 0.000840, a 15.8% improvement on plants the model has never seen.</a:t>
+            </a:r>
+          </a:p>
+          <a:p>
+            <a:pPr algn="l">
+              <a:spcAft>
+                <a:spcPts val="400"/>
+              </a:spcAft>
+            </a:pPr>
+            <a:r>
+              <a:rPr sz="700" b="0">
+                <a:solidFill>
+                  <a:srgbClr val="3D4C55"/>
+                </a:solidFill>
+                <a:latin typeface="Calibri"/>
+              </a:rPr>
+              <a:t/>
+            </a:r>
+          </a:p>
+          <a:p>
+            <a:pPr algn="l">
+              <a:spcAft>
+                <a:spcPts val="400"/>
+              </a:spcAft>
+            </a:pPr>
+            <a:r>
+              <a:rPr sz="1300" b="1">
+                <a:solidFill>
+                  <a:srgbClr val="0C6F7D"/>
+                </a:solidFill>
+                <a:latin typeface="Calibri"/>
+              </a:rPr>
+              <a:t>Masking the source helps.</a:t>
+            </a:r>
+          </a:p>
+          <a:p>
+            <a:pPr algn="l">
+              <a:spcAft>
+                <a:spcPts val="400"/>
+              </a:spcAft>
+            </a:pPr>
+            <a:r>
+              <a:rPr sz="1250" b="0">
+                <a:solidFill>
+                  <a:srgbClr val="3D4C55"/>
+                </a:solidFill>
+                <a:latin typeface="Calibri"/>
+              </a:rPr>
+              <a:t>Hiding half the RGB tokens on the cross-modal training path buys a further 5.8%, replicated across two seeds.</a:t>
+            </a:r>
+          </a:p>
+          <a:p>
+            <a:pPr algn="l">
+              <a:spcAft>
+                <a:spcPts val="400"/>
+              </a:spcAft>
+            </a:pPr>
+            <a:r>
+              <a:rPr sz="700" b="0">
+                <a:solidFill>
+                  <a:srgbClr val="3D4C55"/>
+                </a:solidFill>
+                <a:latin typeface="Calibri"/>
+              </a:rPr>
+              <a:t/>
+            </a:r>
+          </a:p>
+          <a:p>
+            <a:pPr algn="l">
+              <a:spcAft>
+                <a:spcPts val="400"/>
+              </a:spcAft>
+            </a:pPr>
+            <a:r>
+              <a:rPr sz="1300" b="1">
+                <a:solidFill>
+                  <a:srgbClr val="0C6F7D"/>
+                </a:solidFill>
+                <a:latin typeface="Calibri"/>
+              </a:rPr>
+              <a:t>Depth is the better single sensor.</a:t>
+            </a:r>
+          </a:p>
+          <a:p>
+            <a:pPr algn="l">
+              <a:spcAft>
+                <a:spcPts val="400"/>
+              </a:spcAft>
+            </a:pPr>
+            <a:r>
+              <a:rPr sz="1250" b="0">
+                <a:solidFill>
+                  <a:srgbClr val="3D4C55"/>
+                </a:solidFill>
+                <a:latin typeface="Calibri"/>
+              </a:rPr>
+              <a:t>0.000620 against 0.000791 from RGB — 22% better, which matters if a depth camera is an option in the field.</a:t>
+            </a:r>
+          </a:p>
+        </p:txBody>
+      </p:sp>
+    </p:spTree>
+  </p:cSld>
+  <p:clrMapOvr>
+    <a:masterClrMapping/>
+  </p:clrMapOvr>
+</p:sld>
+</file>
+
+<file path=ppt/slides/slide8.xml><?xml version="1.0" encoding="utf-8"?>
+<p:sld xmlns:a="http://schemas.openxmlformats.org/drawingml/2006/main" xmlns:p="http://schemas.openxmlformats.org/presentationml/2006/main" xmlns:r="http://schemas.openxmlformats.org/officeDocument/2006/relationships">
+  <p:cSld>
+    <p:bg>
+      <p:bgPr>
+        <a:solidFill>
+          <a:srgbClr val="FFFFFF"/>
+        </a:solidFill>
+        <a:effectLst/>
+      </p:bgPr>
+    </p:bg>
+    <p:spTree>
+      <p:nvGrpSpPr>
+        <p:cNvPr id="1" name=""/>
+        <p:cNvGrpSpPr/>
+        <p:nvPr/>
+      </p:nvGrpSpPr>
+      <p:grpSpPr/>
+      <p:sp>
+        <p:nvSpPr>
+          <p:cNvPr id="2" name="TextBox 1"/>
+          <p:cNvSpPr txBox="1"/>
+          <p:nvPr/>
+        </p:nvSpPr>
+        <p:spPr>
+          <a:xfrm>
+            <a:off x="502920" y="274320"/>
+            <a:ext cx="640080" cy="365760"/>
+          </a:xfrm>
+          <a:prstGeom prst="rect">
+            <a:avLst/>
+          </a:prstGeom>
+          <a:noFill/>
+        </p:spPr>
+        <p:txBody>
+          <a:bodyPr wrap="square">
+            <a:normAutofit/>
+          </a:bodyPr>
+          <a:lstStyle/>
+          <a:p>
+            <a:pPr algn="l">
+              <a:spcAft>
+                <a:spcPts val="400"/>
+              </a:spcAft>
+            </a:pPr>
+            <a:r>
+              <a:rPr sz="1300" b="1">
+                <a:solidFill>
+                  <a:srgbClr val="0C6F7D"/>
+                </a:solidFill>
+                <a:latin typeface="Consolas"/>
+              </a:rPr>
+              <a:t>07</a:t>
+            </a:r>
+          </a:p>
+        </p:txBody>
+      </p:sp>
+      <p:sp>
+        <p:nvSpPr>
+          <p:cNvPr id="3" name="TextBox 2"/>
+          <p:cNvSpPr txBox="1"/>
+          <p:nvPr/>
+        </p:nvSpPr>
+        <p:spPr>
+          <a:xfrm>
+            <a:off x="1234440" y="164592"/>
+            <a:ext cx="7543800" cy="932688"/>
+          </a:xfrm>
+          <a:prstGeom prst="rect">
+            <a:avLst/>
+          </a:prstGeom>
+          <a:noFill/>
+        </p:spPr>
+        <p:txBody>
+          <a:bodyPr wrap="square">
+            <a:normAutofit/>
+          </a:bodyPr>
+          <a:lstStyle/>
+          <a:p>
+            <a:pPr algn="l">
+              <a:spcAft>
+                <a:spcPts val="400"/>
+              </a:spcAft>
+            </a:pPr>
+            <a:r>
+              <a:rPr sz="2200" b="1">
+                <a:solidFill>
+                  <a:srgbClr val="10171C"/>
+                </a:solidFill>
+                <a:latin typeface="Calibri"/>
+              </a:rPr>
+              <a:t>Results at equal compute</a:t>
+            </a:r>
+          </a:p>
+        </p:txBody>
+      </p:sp>
+      <p:sp>
+        <p:nvSpPr>
+          <p:cNvPr id="4" name="TextBox 3"/>
+          <p:cNvSpPr txBox="1"/>
+          <p:nvPr/>
+        </p:nvSpPr>
+        <p:spPr>
+          <a:xfrm>
+            <a:off x="9052560" y="292608"/>
+            <a:ext cx="2697480" cy="530352"/>
+          </a:xfrm>
+          <a:prstGeom prst="rect">
+            <a:avLst/>
+          </a:prstGeom>
+          <a:noFill/>
+        </p:spPr>
+        <p:txBody>
+          <a:bodyPr wrap="square">
+            <a:normAutofit/>
+          </a:bodyPr>
+          <a:lstStyle/>
+          <a:p>
+            <a:pPr algn="r">
+              <a:spcAft>
+                <a:spcPts val="400"/>
+              </a:spcAft>
+            </a:pPr>
+            <a:r>
+              <a:rPr sz="1100" b="0">
+                <a:solidFill>
+                  <a:srgbClr val="6B7C86"/>
+                </a:solidFill>
+                <a:latin typeface="Consolas"/>
+              </a:rPr>
+              <a:t>every arm = 197,400 steps</a:t>
+            </a:r>
+          </a:p>
+        </p:txBody>
+      </p:sp>
+      <p:sp>
+        <p:nvSpPr>
+          <p:cNvPr id="5" name="Rectangle 4"/>
+          <p:cNvSpPr/>
+          <p:nvPr/>
+        </p:nvSpPr>
+        <p:spPr>
+          <a:xfrm>
+            <a:off x="502920" y="1188720"/>
+            <a:ext cx="11155680" cy="27940"/>
+          </a:xfrm>
+          <a:prstGeom prst="rect">
+            <a:avLst/>
+          </a:prstGeom>
+          <a:solidFill>
+            <a:srgbClr val="10171C"/>
+          </a:solidFill>
+          <a:ln>
+            <a:noFill/>
+          </a:ln>
+          <a:effectLst/>
+        </p:spPr>
+        <p:style>
+          <a:lnRef idx="1">
+            <a:schemeClr val="accent1"/>
+          </a:lnRef>
+          <a:fillRef idx="3">
+            <a:schemeClr val="accent1"/>
+          </a:fillRef>
+          <a:effectRef idx="2">
+            <a:schemeClr val="accent1"/>
+          </a:effectRef>
+          <a:fontRef idx="minor">
+            <a:schemeClr val="lt1"/>
+          </a:fontRef>
+        </p:style>
+        <p:txBody>
+          <a:bodyPr rtlCol="0" anchor="ctr"/>
+          <a:lstStyle/>
+          <a:p>
+            <a:pPr algn="ctr"/>
+          </a:p>
+        </p:txBody>
+      </p:sp>
+      <p:pic>
+        <p:nvPicPr>
+          <p:cNvPr id="6" name="Picture 5" descr="charts.png"/>
+          <p:cNvPicPr>
+            <a:picLocks noChangeAspect="1"/>
+          </p:cNvPicPr>
+          <p:nvPr/>
+        </p:nvPicPr>
+        <p:blipFill>
+          <a:blip r:embed="rId2"/>
+          <a:stretch>
+            <a:fillRect/>
+          </a:stretch>
+        </p:blipFill>
+        <p:spPr>
+          <a:xfrm>
+            <a:off x="411480" y="1520813"/>
+            <a:ext cx="11338560" cy="3350029"/>
+          </a:xfrm>
+          <a:prstGeom prst="rect">
+            <a:avLst/>
+          </a:prstGeom>
+        </p:spPr>
+      </p:pic>
+      <p:sp>
+        <p:nvSpPr>
+          <p:cNvPr id="7" name="TextBox 6"/>
+          <p:cNvSpPr txBox="1"/>
+          <p:nvPr/>
+        </p:nvSpPr>
+        <p:spPr>
+          <a:xfrm>
+            <a:off x="502920" y="5166360"/>
+            <a:ext cx="11155680" cy="1371600"/>
+          </a:xfrm>
+          <a:prstGeom prst="rect">
+            <a:avLst/>
+          </a:prstGeom>
+          <a:noFill/>
+        </p:spPr>
+        <p:txBody>
+          <a:bodyPr wrap="square">
+            <a:normAutofit/>
+          </a:bodyPr>
+          <a:lstStyle/>
+          <a:p>
+            <a:pPr algn="l">
+              <a:spcAft>
+                <a:spcPts val="400"/>
+              </a:spcAft>
+            </a:pPr>
+            <a:r>
+              <a:rPr sz="1400" b="1">
+                <a:solidFill>
+                  <a:srgbClr val="10171C"/>
+                </a:solidFill>
+                <a:latin typeface="Calibri"/>
+              </a:rPr>
+              <a:t>RGB buys −49.4% and depth a further 16 points — but adding the parametric stream gives back everything depth gained.</a:t>
+            </a:r>
+          </a:p>
+          <a:p>
+            <a:pPr algn="l">
+              <a:spcAft>
+                <a:spcPts val="400"/>
+              </a:spcAft>
+            </a:pPr>
+            <a:r>
+              <a:rPr sz="1250" b="0">
+                <a:solidFill>
+                  <a:srgbClr val="3D4C55"/>
+                </a:solidFill>
+                <a:latin typeface="Calibri"/>
+              </a:rPr>
+              <a:t>10,000 and 10,500 plants differ by 5% in data, yet the larger arm scores 3.0% worse: those two runs are effectively a duplicate, so ≈3% is this pipeline's noise floor. That makes 3k→10k (−6.9%) only ~2.3× noise, while 25M→114M parameters buys −17.1%. At this budget, capacity pays better than data.</a:t>
+            </a:r>
+          </a:p>
+        </p:txBody>
+      </p:sp>
+    </p:spTree>
+  </p:cSld>
+  <p:clrMapOvr>
+    <a:masterClrMapping/>
+  </p:clrMapOvr>
+</p:sld>
+</file>
+
+<file path=ppt/slides/slide9.xml><?xml version="1.0" encoding="utf-8"?>
+<p:sld xmlns:a="http://schemas.openxmlformats.org/drawingml/2006/main" xmlns:p="http://schemas.openxmlformats.org/presentationml/2006/main" xmlns:r="http://schemas.openxmlformats.org/officeDocument/2006/relationships">
+  <p:cSld>
+    <p:bg>
+      <p:bgPr>
+        <a:solidFill>
+          <a:srgbClr val="FFFFFF"/>
+        </a:solidFill>
+        <a:effectLst/>
+      </p:bgPr>
+    </p:bg>
+    <p:spTree>
+      <p:nvGrpSpPr>
+        <p:cNvPr id="1" name=""/>
+        <p:cNvGrpSpPr/>
+        <p:nvPr/>
+      </p:nvGrpSpPr>
+      <p:grpSpPr/>
+      <p:sp>
+        <p:nvSpPr>
+          <p:cNvPr id="2" name="TextBox 1"/>
+          <p:cNvSpPr txBox="1"/>
+          <p:nvPr/>
+        </p:nvSpPr>
+        <p:spPr>
+          <a:xfrm>
+            <a:off x="502920" y="274320"/>
+            <a:ext cx="640080" cy="365760"/>
+          </a:xfrm>
+          <a:prstGeom prst="rect">
+            <a:avLst/>
+          </a:prstGeom>
+          <a:noFill/>
+        </p:spPr>
+        <p:txBody>
+          <a:bodyPr wrap="square">
+            <a:normAutofit/>
+          </a:bodyPr>
+          <a:lstStyle/>
+          <a:p>
+            <a:pPr algn="l">
+              <a:spcAft>
+                <a:spcPts val="400"/>
+              </a:spcAft>
+            </a:pPr>
+            <a:r>
+              <a:rPr sz="1300" b="1">
+                <a:solidFill>
+                  <a:srgbClr val="0C6F7D"/>
+                </a:solidFill>
+                <a:latin typeface="Consolas"/>
+              </a:rPr>
+              <a:t>08</a:t>
+            </a:r>
+          </a:p>
+        </p:txBody>
+      </p:sp>
+      <p:sp>
+        <p:nvSpPr>
+          <p:cNvPr id="3" name="TextBox 2"/>
+          <p:cNvSpPr txBox="1"/>
+          <p:nvPr/>
+        </p:nvSpPr>
+        <p:spPr>
+          <a:xfrm>
+            <a:off x="1234440" y="164592"/>
+            <a:ext cx="7543800" cy="932688"/>
+          </a:xfrm>
+          <a:prstGeom prst="rect">
+            <a:avLst/>
+          </a:prstGeom>
+          <a:noFill/>
+        </p:spPr>
+        <p:txBody>
+          <a:bodyPr wrap="square">
+            <a:normAutofit/>
+          </a:bodyPr>
+          <a:lstStyle/>
+          <a:p>
+            <a:pPr algn="l">
+              <a:spcAft>
+                <a:spcPts val="400"/>
+              </a:spcAft>
+            </a:pPr>
+            <a:r>
+              <a:rPr sz="2200" b="1">
+                <a:solidFill>
+                  <a:srgbClr val="10171C"/>
+                </a:solidFill>
+                <a:latin typeface="Calibri"/>
+              </a:rPr>
+              <a:t>What the model cannot predict</a:t>
+            </a:r>
+          </a:p>
+        </p:txBody>
+      </p:sp>
+      <p:sp>
+        <p:nvSpPr>
+          <p:cNvPr id="4" name="TextBox 3"/>
+          <p:cNvSpPr txBox="1"/>
+          <p:nvPr/>
+        </p:nvSpPr>
+        <p:spPr>
+          <a:xfrm>
+            <a:off x="9052560" y="292608"/>
+            <a:ext cx="2697480" cy="530352"/>
+          </a:xfrm>
+          <a:prstGeom prst="rect">
+            <a:avLst/>
+          </a:prstGeom>
+          <a:noFill/>
+        </p:spPr>
+        <p:txBody>
+          <a:bodyPr wrap="square">
+            <a:normAutofit/>
+          </a:bodyPr>
+          <a:lstStyle/>
+          <a:p>
+            <a:pPr algn="r">
+              <a:spcAft>
+                <a:spcPts val="400"/>
+              </a:spcAft>
+            </a:pPr>
+            <a:r>
+              <a:rPr sz="1100" b="0">
+                <a:solidFill>
+                  <a:srgbClr val="6B7C86"/>
+                </a:solidFill>
+                <a:latin typeface="Consolas"/>
+              </a:rPr>
+              <a:t>ground truth, coloured by coverage</a:t>
+            </a:r>
+          </a:p>
+        </p:txBody>
+      </p:sp>
+      <p:sp>
+        <p:nvSpPr>
+          <p:cNvPr id="5" name="Rectangle 4"/>
+          <p:cNvSpPr/>
+          <p:nvPr/>
+        </p:nvSpPr>
+        <p:spPr>
+          <a:xfrm>
+            <a:off x="502920" y="1188720"/>
+            <a:ext cx="11155680" cy="27940"/>
+          </a:xfrm>
+          <a:prstGeom prst="rect">
+            <a:avLst/>
+          </a:prstGeom>
+          <a:solidFill>
+            <a:srgbClr val="10171C"/>
+          </a:solidFill>
+          <a:ln>
+            <a:noFill/>
+          </a:ln>
+          <a:effectLst/>
+        </p:spPr>
+        <p:style>
+          <a:lnRef idx="1">
+            <a:schemeClr val="accent1"/>
+          </a:lnRef>
+          <a:fillRef idx="3">
+            <a:schemeClr val="accent1"/>
+          </a:fillRef>
+          <a:effectRef idx="2">
+            <a:schemeClr val="accent1"/>
+          </a:effectRef>
+          <a:fontRef idx="minor">
+            <a:schemeClr val="lt1"/>
+          </a:fontRef>
+        </p:style>
+        <p:txBody>
+          <a:bodyPr rtlCol="0" anchor="ctr"/>
+          <a:lstStyle/>
+          <a:p>
+            <a:pPr algn="ctr"/>
+          </a:p>
+        </p:txBody>
+      </p:sp>
+      <p:pic>
+        <p:nvPicPr>
+          <p:cNvPr id="6" name="Picture 5" descr="coverage.png"/>
+          <p:cNvPicPr>
+            <a:picLocks noChangeAspect="1"/>
+          </p:cNvPicPr>
+          <p:nvPr/>
+        </p:nvPicPr>
+        <p:blipFill>
+          <a:blip r:embed="rId2"/>
+          <a:stretch>
+            <a:fillRect/>
+          </a:stretch>
+        </p:blipFill>
+        <p:spPr>
+          <a:xfrm>
+            <a:off x="411480" y="1805940"/>
+            <a:ext cx="7772400" cy="4114800"/>
+          </a:xfrm>
+          <a:prstGeom prst="rect">
+            <a:avLst/>
+          </a:prstGeom>
+        </p:spPr>
+      </p:pic>
+      <p:sp>
+        <p:nvSpPr>
+          <p:cNvPr id="7" name="TextBox 6"/>
+          <p:cNvSpPr txBox="1"/>
+          <p:nvPr/>
+        </p:nvSpPr>
+        <p:spPr>
+          <a:xfrm>
+            <a:off x="8458200" y="1417320"/>
+            <a:ext cx="3291840" cy="4892040"/>
+          </a:xfrm>
+          <a:prstGeom prst="rect">
+            <a:avLst/>
+          </a:prstGeom>
+          <a:noFill/>
+        </p:spPr>
+        <p:txBody>
+          <a:bodyPr wrap="square">
+            <a:normAutofit/>
+          </a:bodyPr>
+          <a:lstStyle/>
+          <a:p>
+            <a:pPr algn="l">
+              <a:spcAft>
+                <a:spcPts val="400"/>
+              </a:spcAft>
+            </a:pPr>
+            <a:r>
+              <a:rPr sz="2000" b="1">
+                <a:solidFill>
+                  <a:srgbClr val="34A35C"/>
+                </a:solidFill>
+                <a:latin typeface="Calibri"/>
+              </a:rPr>
+              <a:t>Green</a:t>
+            </a:r>
+          </a:p>
+          <a:p>
+            <a:pPr algn="l">
+              <a:spcAft>
+                <a:spcPts val="400"/>
+              </a:spcAft>
+            </a:pPr>
+            <a:r>
+              <a:rPr sz="1250" b="0">
+                <a:solidFill>
+                  <a:srgbClr val="3D4C55"/>
+                </a:solidFill>
+                <a:latin typeface="Calibri"/>
+              </a:rPr>
+              <a:t>a prediction lands within 0.03 of this ground-truth point.</a:t>
+            </a:r>
+          </a:p>
+          <a:p>
+            <a:pPr algn="l">
+              <a:spcAft>
+                <a:spcPts val="400"/>
+              </a:spcAft>
+            </a:pPr>
+            <a:r>
+              <a:rPr sz="800" b="0">
+                <a:solidFill>
+                  <a:srgbClr val="3D4C55"/>
+                </a:solidFill>
+                <a:latin typeface="Calibri"/>
+              </a:rPr>
+              <a:t/>
+            </a:r>
+          </a:p>
+          <a:p>
+            <a:pPr algn="l">
+              <a:spcAft>
+                <a:spcPts val="400"/>
+              </a:spcAft>
+            </a:pPr>
+            <a:r>
+              <a:rPr sz="2000" b="1">
+                <a:solidFill>
+                  <a:srgbClr val="E0493C"/>
+                </a:solidFill>
+                <a:latin typeface="Calibri"/>
+              </a:rPr>
+              <a:t>Red</a:t>
+            </a:r>
+          </a:p>
+          <a:p>
+            <a:pPr algn="l">
+              <a:spcAft>
+                <a:spcPts val="400"/>
+              </a:spcAft>
+            </a:pPr>
+            <a:r>
+              <a:rPr sz="1250" b="0">
+                <a:solidFill>
+                  <a:srgbClr val="3D4C55"/>
+                </a:solidFill>
+                <a:latin typeface="Calibri"/>
+              </a:rPr>
+              <a:t>nothing does — geometry the reconstruction never reached.</a:t>
+            </a:r>
+          </a:p>
+          <a:p>
+            <a:pPr algn="l">
+              <a:spcAft>
+                <a:spcPts val="400"/>
+              </a:spcAft>
+            </a:pPr>
+            <a:r>
+              <a:rPr sz="1000" b="0">
+                <a:solidFill>
+                  <a:srgbClr val="3D4C55"/>
+                </a:solidFill>
+                <a:latin typeface="Calibri"/>
+              </a:rPr>
+              <a:t/>
+            </a:r>
+          </a:p>
+          <a:p>
+            <a:pPr algn="l">
+              <a:spcAft>
+                <a:spcPts val="400"/>
+              </a:spcAft>
+            </a:pPr>
+            <a:r>
+              <a:rPr sz="1250" b="0">
+                <a:solidFill>
+                  <a:srgbClr val="3D4C55"/>
+                </a:solidFill>
+                <a:latin typeface="Calibri"/>
+              </a:rPr>
+              <a:t>Distillation closes the interior of the plant first. Thin leaf tips stay red longest in both models — they are the hardest geometry in the dataset.</a:t>
+            </a:r>
+          </a:p>
+          <a:p>
+            <a:pPr algn="l">
+              <a:spcAft>
+                <a:spcPts val="400"/>
+              </a:spcAft>
+            </a:pPr>
+            <a:r>
+              <a:rPr sz="800" b="0">
+                <a:solidFill>
+                  <a:srgbClr val="3D4C55"/>
+                </a:solidFill>
+                <a:latin typeface="Calibri"/>
+              </a:rPr>
+              <a:t/>
+            </a:r>
+          </a:p>
+          <a:p>
+            <a:pPr algn="l">
+              <a:spcAft>
+                <a:spcPts val="400"/>
+              </a:spcAft>
+            </a:pPr>
+            <a:r>
+              <a:rPr sz="1050" b="0">
+                <a:solidFill>
+                  <a:srgbClr val="6B7C86"/>
+                </a:solidFill>
+                <a:latin typeface="Calibri"/>
+              </a:rPr>
+              <a:t>Threshold 0.03, not the 0.01 training default: at 0.01 about 80% of every cloud is red in both models, which is true but shows nothing. Chamfer reports a SQUARED distance, so 0.0028 is an RMS error near 0.053.</a:t>
+            </a:r>
+          </a:p>
+        </p:txBody>
+      </p:sp>
+    </p:spTree>
+  </p:cSld>
+  <p:clrMapOvr>
+    <a:masterClrMapping/>
+  </p:clrMapOvr>
+</p:sld>
+</file>
+
 <file path=ppt/theme/theme1.xml><?xml version="1.0" encoding="utf-8"?>
 <a:theme xmlns:a="http://schemas.openxmlformats.org/drawingml/2006/main" name="Office Theme">
   <a:themeElements>
